--- a/信吾/NRI/添付ファイル/金融ビジネスモデル_GD対策.pptx
+++ b/信吾/NRI/添付ファイル/金融ビジネスモデル_GD対策.pptx
@@ -1747,7 +1747,7 @@
     <p:bg>
       <p:bgPr>
         <a:solidFill>
-          <a:srgbClr val="1E2761"/>
+          <a:srgbClr val="FFFFFF"/>
         </a:solidFill>
       </p:bgPr>
     </p:bg>
@@ -1765,254 +1765,176 @@
           <a:chExt cx="0" cy="0"/>
         </a:xfrm>
       </p:grpSpPr>
+      <p:sp>
+        <p:nvSpPr>
+          <p:cNvPr id="2" name="Text 0"/>
+          <p:cNvSpPr txBox="1"/>
+          <p:nvPr/>
+        </p:nvSpPr>
+        <p:spPr>
+          <a:xfrm>
+            <a:off x="822960" y="2331720"/>
+            <a:ext cx="9601200" cy="1005840"/>
+          </a:xfrm>
+          <a:prstGeom prst="rect">
+            <a:avLst/>
+          </a:prstGeom>
+          <a:noFill/>
+          <a:ln/>
+        </p:spPr>
+        <p:txBody>
+          <a:bodyPr wrap="square" lIns="0" tIns="0" rIns="0" bIns="0" rtlCol="0" anchor="ctr"/>
+          <a:lstStyle/>
+          <a:p>
+            <a:pPr indent="0" marL="0">
+              <a:buNone/>
+            </a:pPr>
+            <a:r>
+              <a:rPr lang="en-US" sz="4400" b="1" dirty="0">
+                <a:solidFill>
+                  <a:srgbClr val="1A1A1A"/>
+                </a:solidFill>
+                <a:latin typeface="Cambria" pitchFamily="34" charset="0"/>
+                <a:ea typeface="Cambria" pitchFamily="34" charset="-122"/>
+                <a:cs typeface="Cambria" pitchFamily="34" charset="-120"/>
+              </a:rPr>
+              <a:t>金融ビジネスモデル研究</a:t>
+            </a:r>
+            <a:endParaRPr lang="en-US" sz="4400" dirty="0"/>
+          </a:p>
+        </p:txBody>
+      </p:sp>
+      <p:sp>
+        <p:nvSpPr>
+          <p:cNvPr id="3" name="Text 1"/>
+          <p:cNvSpPr txBox="1"/>
+          <p:nvPr/>
+        </p:nvSpPr>
+        <p:spPr>
+          <a:xfrm>
+            <a:off x="822960" y="3246120"/>
+            <a:ext cx="9601200" cy="502920"/>
+          </a:xfrm>
+          <a:prstGeom prst="rect">
+            <a:avLst/>
+          </a:prstGeom>
+          <a:noFill/>
+          <a:ln/>
+        </p:spPr>
+        <p:txBody>
+          <a:bodyPr wrap="square" lIns="0" tIns="0" rIns="0" bIns="0" rtlCol="0" anchor="ctr"/>
+          <a:lstStyle/>
+          <a:p>
+            <a:pPr indent="0" marL="0">
+              <a:buNone/>
+            </a:pPr>
+            <a:r>
+              <a:rPr lang="en-US" sz="1800" dirty="0">
+                <a:solidFill>
+                  <a:srgbClr val="333333"/>
+                </a:solidFill>
+                <a:latin typeface="Calibri" pitchFamily="34" charset="0"/>
+                <a:ea typeface="Calibri" pitchFamily="34" charset="-122"/>
+                <a:cs typeface="Calibri" pitchFamily="34" charset="-120"/>
+              </a:rPr>
+              <a:t>NRI 経営戦略コンサルティングコース インターン グループディスカッション対策</a:t>
+            </a:r>
+            <a:endParaRPr lang="en-US" sz="1800" dirty="0"/>
+          </a:p>
+        </p:txBody>
+      </p:sp>
+      <p:sp>
+        <p:nvSpPr>
+          <p:cNvPr id="4" name="Shape 2"/>
+          <p:cNvSpPr/>
+          <p:nvPr/>
+        </p:nvSpPr>
+        <p:spPr>
+          <a:xfrm>
+            <a:off x="822960" y="3886200"/>
+            <a:ext cx="2011680" cy="0"/>
+          </a:xfrm>
+          <a:prstGeom prst="line">
+            <a:avLst/>
+          </a:prstGeom>
+          <a:noFill/>
+          <a:ln w="19050">
+            <a:solidFill>
+              <a:srgbClr val="1A1A1A"/>
+            </a:solidFill>
+            <a:prstDash val="solid"/>
+          </a:ln>
+        </p:spPr>
+      </p:sp>
+      <p:sp>
+        <p:nvSpPr>
+          <p:cNvPr id="5" name="Text 3"/>
+          <p:cNvSpPr txBox="1"/>
+          <p:nvPr/>
+        </p:nvSpPr>
+        <p:spPr>
+          <a:xfrm>
+            <a:off x="822960" y="4069080"/>
+            <a:ext cx="7315200" cy="365760"/>
+          </a:xfrm>
+          <a:prstGeom prst="rect">
+            <a:avLst/>
+          </a:prstGeom>
+          <a:noFill/>
+          <a:ln/>
+        </p:spPr>
+        <p:txBody>
+          <a:bodyPr wrap="square" lIns="0" tIns="0" rIns="0" bIns="0" rtlCol="0" anchor="ctr"/>
+          <a:lstStyle/>
+          <a:p>
+            <a:pPr indent="0" marL="0">
+              <a:buNone/>
+            </a:pPr>
+            <a:r>
+              <a:rPr lang="en-US" sz="1300" dirty="0">
+                <a:solidFill>
+                  <a:srgbClr val="6B7280"/>
+                </a:solidFill>
+                <a:latin typeface="Calibri" pitchFamily="34" charset="0"/>
+                <a:ea typeface="Calibri" pitchFamily="34" charset="-122"/>
+                <a:cs typeface="Calibri" pitchFamily="34" charset="-120"/>
+              </a:rPr>
+              <a:t>信吾　|　2026年8月26日</a:t>
+            </a:r>
+            <a:endParaRPr lang="en-US" sz="1300" dirty="0"/>
+          </a:p>
+        </p:txBody>
+      </p:sp>
+      <p:sp>
+        <p:nvSpPr>
+          <p:cNvPr id="6" name="Shape 4"/>
+          <p:cNvSpPr/>
+          <p:nvPr/>
+        </p:nvSpPr>
+        <p:spPr>
+          <a:xfrm>
+            <a:off x="9966960" y="4023360"/>
+            <a:ext cx="1371600" cy="1371600"/>
+          </a:xfrm>
+          <a:prstGeom prst="ellipse">
+            <a:avLst/>
+          </a:prstGeom>
+          <a:solidFill>
+            <a:srgbClr val="EAEBEF"/>
+          </a:solidFill>
+          <a:ln/>
+        </p:spPr>
+      </p:sp>
       <p:pic>
         <p:nvPicPr>
-          <p:cNvPr id="2" name="Image 0" descr="preencoded.png">    </p:cNvPr>
+          <p:cNvPr id="7" name="Image 0" descr="preencoded.png">    </p:cNvPr>
           <p:cNvPicPr>
             <a:picLocks noChangeAspect="1"/>
           </p:cNvPicPr>
           <p:nvPr/>
         </p:nvPicPr>
         <p:blipFill>
-          <a:blip r:embed="rId1">
-            <a:alphaModFix amt="10000"/>
-          </a:blip>
-          <a:stretch>
-            <a:fillRect/>
-          </a:stretch>
-        </p:blipFill>
-        <p:spPr>
-          <a:xfrm>
-            <a:off x="9418320" y="274320"/>
-            <a:ext cx="2377440" cy="2377440"/>
-          </a:xfrm>
-          <a:prstGeom prst="rect">
-            <a:avLst/>
-          </a:prstGeom>
-        </p:spPr>
-      </p:pic>
-      <p:pic>
-        <p:nvPicPr>
-          <p:cNvPr id="3" name="Image 1" descr="preencoded.png">    </p:cNvPr>
-          <p:cNvPicPr>
-            <a:picLocks noChangeAspect="1"/>
-          </p:cNvPicPr>
-          <p:nvPr/>
-        </p:nvPicPr>
-        <p:blipFill>
-          <a:blip r:embed="rId2">
-            <a:alphaModFix amt="10000"/>
-          </a:blip>
-          <a:stretch>
-            <a:fillRect/>
-          </a:stretch>
-        </p:blipFill>
-        <p:spPr>
-          <a:xfrm>
-            <a:off x="9464040" y="320040"/>
-            <a:ext cx="2377440" cy="2377440"/>
-          </a:xfrm>
-          <a:prstGeom prst="rect">
-            <a:avLst/>
-          </a:prstGeom>
-        </p:spPr>
-      </p:pic>
-      <p:pic>
-        <p:nvPicPr>
-          <p:cNvPr id="4" name="Image 2" descr="preencoded.png">    </p:cNvPr>
-          <p:cNvPicPr>
-            <a:picLocks noChangeAspect="1"/>
-          </p:cNvPicPr>
-          <p:nvPr/>
-        </p:nvPicPr>
-        <p:blipFill>
-          <a:blip r:embed="rId3">
-            <a:alphaModFix amt="10000"/>
-          </a:blip>
-          <a:stretch>
-            <a:fillRect/>
-          </a:stretch>
-        </p:blipFill>
-        <p:spPr>
-          <a:xfrm>
-            <a:off x="9509760" y="365760"/>
-            <a:ext cx="2377440" cy="2377440"/>
-          </a:xfrm>
-          <a:prstGeom prst="rect">
-            <a:avLst/>
-          </a:prstGeom>
-        </p:spPr>
-      </p:pic>
-      <p:sp>
-        <p:nvSpPr>
-          <p:cNvPr id="5" name="Text 0"/>
-          <p:cNvSpPr txBox="1"/>
-          <p:nvPr/>
-        </p:nvSpPr>
-        <p:spPr>
-          <a:xfrm>
-            <a:off x="822960" y="2331720"/>
-            <a:ext cx="9601200" cy="1005840"/>
-          </a:xfrm>
-          <a:prstGeom prst="rect">
-            <a:avLst/>
-          </a:prstGeom>
-          <a:noFill/>
-          <a:ln/>
-        </p:spPr>
-        <p:txBody>
-          <a:bodyPr wrap="square" lIns="0" tIns="0" rIns="0" bIns="0" rtlCol="0" anchor="ctr"/>
-          <a:lstStyle/>
-          <a:p>
-            <a:pPr indent="0" marL="0">
-              <a:buNone/>
-            </a:pPr>
-            <a:r>
-              <a:rPr lang="en-US" sz="4400" b="1" dirty="0">
-                <a:solidFill>
-                  <a:srgbClr val="FFFFFF"/>
-                </a:solidFill>
-                <a:latin typeface="Cambria" pitchFamily="34" charset="0"/>
-                <a:ea typeface="Cambria" pitchFamily="34" charset="-122"/>
-                <a:cs typeface="Cambria" pitchFamily="34" charset="-120"/>
-              </a:rPr>
-              <a:t>金融ビジネスモデル研究</a:t>
-            </a:r>
-            <a:endParaRPr lang="en-US" sz="4400" dirty="0"/>
-          </a:p>
-        </p:txBody>
-      </p:sp>
-      <p:sp>
-        <p:nvSpPr>
-          <p:cNvPr id="6" name="Text 1"/>
-          <p:cNvSpPr txBox="1"/>
-          <p:nvPr/>
-        </p:nvSpPr>
-        <p:spPr>
-          <a:xfrm>
-            <a:off x="822960" y="3246120"/>
-            <a:ext cx="9601200" cy="502920"/>
-          </a:xfrm>
-          <a:prstGeom prst="rect">
-            <a:avLst/>
-          </a:prstGeom>
-          <a:noFill/>
-          <a:ln/>
-        </p:spPr>
-        <p:txBody>
-          <a:bodyPr wrap="square" lIns="0" tIns="0" rIns="0" bIns="0" rtlCol="0" anchor="ctr"/>
-          <a:lstStyle/>
-          <a:p>
-            <a:pPr indent="0" marL="0">
-              <a:buNone/>
-            </a:pPr>
-            <a:r>
-              <a:rPr lang="en-US" sz="1800" dirty="0">
-                <a:solidFill>
-                  <a:srgbClr val="CADCFC"/>
-                </a:solidFill>
-                <a:latin typeface="Calibri" pitchFamily="34" charset="0"/>
-                <a:ea typeface="Calibri" pitchFamily="34" charset="-122"/>
-                <a:cs typeface="Calibri" pitchFamily="34" charset="-120"/>
-              </a:rPr>
-              <a:t>NRI 経営戦略コンサルティングコース インターン グループディスカッション対策</a:t>
-            </a:r>
-            <a:endParaRPr lang="en-US" sz="1800" dirty="0"/>
-          </a:p>
-        </p:txBody>
-      </p:sp>
-      <p:sp>
-        <p:nvSpPr>
-          <p:cNvPr id="7" name="Shape 2"/>
-          <p:cNvSpPr/>
-          <p:nvPr/>
-        </p:nvSpPr>
-        <p:spPr>
-          <a:xfrm>
-            <a:off x="822960" y="3886200"/>
-            <a:ext cx="2011680" cy="0"/>
-          </a:xfrm>
-          <a:prstGeom prst="line">
-            <a:avLst/>
-          </a:prstGeom>
-          <a:noFill/>
-          <a:ln w="25400">
-            <a:solidFill>
-              <a:srgbClr val="C9A227"/>
-            </a:solidFill>
-            <a:prstDash val="solid"/>
-          </a:ln>
-        </p:spPr>
-      </p:sp>
-      <p:sp>
-        <p:nvSpPr>
-          <p:cNvPr id="8" name="Text 3"/>
-          <p:cNvSpPr txBox="1"/>
-          <p:nvPr/>
-        </p:nvSpPr>
-        <p:spPr>
-          <a:xfrm>
-            <a:off x="822960" y="4069080"/>
-            <a:ext cx="7315200" cy="365760"/>
-          </a:xfrm>
-          <a:prstGeom prst="rect">
-            <a:avLst/>
-          </a:prstGeom>
-          <a:noFill/>
-          <a:ln/>
-        </p:spPr>
-        <p:txBody>
-          <a:bodyPr wrap="square" lIns="0" tIns="0" rIns="0" bIns="0" rtlCol="0" anchor="ctr"/>
-          <a:lstStyle/>
-          <a:p>
-            <a:pPr indent="0" marL="0">
-              <a:buNone/>
-            </a:pPr>
-            <a:r>
-              <a:rPr lang="en-US" sz="1300" dirty="0">
-                <a:solidFill>
-                  <a:srgbClr val="CADCFC"/>
-                </a:solidFill>
-                <a:latin typeface="Calibri" pitchFamily="34" charset="0"/>
-                <a:ea typeface="Calibri" pitchFamily="34" charset="-122"/>
-                <a:cs typeface="Calibri" pitchFamily="34" charset="-120"/>
-              </a:rPr>
-              <a:t>信吾　|　2026年8月26日</a:t>
-            </a:r>
-            <a:endParaRPr lang="en-US" sz="1300" dirty="0"/>
-          </a:p>
-        </p:txBody>
-      </p:sp>
-      <p:sp>
-        <p:nvSpPr>
-          <p:cNvPr id="9" name="Shape 4"/>
-          <p:cNvSpPr/>
-          <p:nvPr/>
-        </p:nvSpPr>
-        <p:spPr>
-          <a:xfrm>
-            <a:off x="9966960" y="4023360"/>
-            <a:ext cx="1371600" cy="1371600"/>
-          </a:xfrm>
-          <a:prstGeom prst="ellipse">
-            <a:avLst/>
-          </a:prstGeom>
-          <a:solidFill>
-            <a:srgbClr val="CADCFC"/>
-          </a:solidFill>
-          <a:ln/>
-        </p:spPr>
-      </p:sp>
-      <p:pic>
-        <p:nvPicPr>
-          <p:cNvPr id="10" name="Image 3" descr="preencoded.png">    </p:cNvPr>
-          <p:cNvPicPr>
-            <a:picLocks noChangeAspect="1"/>
-          </p:cNvPicPr>
-          <p:nvPr/>
-        </p:nvPicPr>
-        <p:blipFill>
-          <a:blip r:embed="rId4"/>
+          <a:blip r:embed="rId1"/>
           <a:stretch>
             <a:fillRect/>
           </a:stretch>
@@ -2086,7 +2008,7 @@
             <a:r>
               <a:rPr lang="en-US" sz="1300" b="1" spc="200" kern="0" dirty="0">
                 <a:solidFill>
-                  <a:srgbClr val="C9A227"/>
+                  <a:srgbClr val="6B7280"/>
                 </a:solidFill>
                 <a:latin typeface="Calibri" pitchFamily="34" charset="0"/>
                 <a:ea typeface="Calibri" pitchFamily="34" charset="-122"/>
@@ -2125,7 +2047,7 @@
             <a:r>
               <a:rPr lang="en-US" sz="3000" b="1" dirty="0">
                 <a:solidFill>
-                  <a:srgbClr val="1E2761"/>
+                  <a:srgbClr val="1A1A1A"/>
                 </a:solidFill>
                 <a:latin typeface="Cambria" pitchFamily="34" charset="0"/>
                 <a:ea typeface="Cambria" pitchFamily="34" charset="-122"/>
@@ -2167,7 +2089,7 @@
             <a:r>
               <a:rPr lang="en-US" sz="1350" dirty="0">
                 <a:solidFill>
-                  <a:srgbClr val="22263A"/>
+                  <a:srgbClr val="333333"/>
                 </a:solidFill>
                 <a:latin typeface="Calibri" pitchFamily="34" charset="0"/>
                 <a:ea typeface="Calibri" pitchFamily="34" charset="-122"/>
@@ -2196,7 +2118,7 @@
             </a:avLst>
           </a:prstGeom>
           <a:solidFill>
-            <a:srgbClr val="F4F6FB"/>
+            <a:srgbClr val="F3F4F6"/>
           </a:solidFill>
           <a:ln/>
         </p:spPr>
@@ -2216,7 +2138,7 @@
             <a:avLst/>
           </a:prstGeom>
           <a:solidFill>
-            <a:srgbClr val="CADCFC"/>
+            <a:srgbClr val="EAEBEF"/>
           </a:solidFill>
           <a:ln/>
         </p:spPr>
@@ -2272,7 +2194,7 @@
             <a:r>
               <a:rPr lang="en-US" sz="1350" b="1" dirty="0">
                 <a:solidFill>
-                  <a:srgbClr val="1E2761"/>
+                  <a:srgbClr val="1A1A1A"/>
                 </a:solidFill>
                 <a:latin typeface="Cambria" pitchFamily="34" charset="0"/>
                 <a:ea typeface="Cambria" pitchFamily="34" charset="-122"/>
@@ -2314,7 +2236,7 @@
             <a:r>
               <a:rPr lang="en-US" sz="1100" dirty="0">
                 <a:solidFill>
-                  <a:srgbClr val="22263A"/>
+                  <a:srgbClr val="333333"/>
                 </a:solidFill>
                 <a:latin typeface="Calibri" pitchFamily="34" charset="0"/>
                 <a:ea typeface="Calibri" pitchFamily="34" charset="-122"/>
@@ -2367,7 +2289,7 @@
             </a:avLst>
           </a:prstGeom>
           <a:solidFill>
-            <a:srgbClr val="1E2761"/>
+            <a:srgbClr val="F3F4F6"/>
           </a:solidFill>
           <a:ln/>
         </p:spPr>
@@ -2387,7 +2309,7 @@
             <a:avLst/>
           </a:prstGeom>
           <a:solidFill>
-            <a:srgbClr val="C9A227"/>
+            <a:srgbClr val="EAEBEF"/>
           </a:solidFill>
           <a:ln/>
         </p:spPr>
@@ -2443,7 +2365,7 @@
             <a:r>
               <a:rPr lang="en-US" sz="1350" b="1" dirty="0">
                 <a:solidFill>
-                  <a:srgbClr val="FFFFFF"/>
+                  <a:srgbClr val="1A1A1A"/>
                 </a:solidFill>
                 <a:latin typeface="Cambria" pitchFamily="34" charset="0"/>
                 <a:ea typeface="Cambria" pitchFamily="34" charset="-122"/>
@@ -2485,7 +2407,7 @@
             <a:r>
               <a:rPr lang="en-US" sz="1100" dirty="0">
                 <a:solidFill>
-                  <a:srgbClr val="CADCFC"/>
+                  <a:srgbClr val="333333"/>
                 </a:solidFill>
                 <a:latin typeface="Calibri" pitchFamily="34" charset="0"/>
                 <a:ea typeface="Calibri" pitchFamily="34" charset="-122"/>
@@ -2538,7 +2460,7 @@
             </a:avLst>
           </a:prstGeom>
           <a:solidFill>
-            <a:srgbClr val="F4F6FB"/>
+            <a:srgbClr val="F3F4F6"/>
           </a:solidFill>
           <a:ln/>
         </p:spPr>
@@ -2558,7 +2480,7 @@
             <a:avLst/>
           </a:prstGeom>
           <a:solidFill>
-            <a:srgbClr val="CADCFC"/>
+            <a:srgbClr val="EAEBEF"/>
           </a:solidFill>
           <a:ln/>
         </p:spPr>
@@ -2614,7 +2536,7 @@
             <a:r>
               <a:rPr lang="en-US" sz="1350" b="1" dirty="0">
                 <a:solidFill>
-                  <a:srgbClr val="1E2761"/>
+                  <a:srgbClr val="1A1A1A"/>
                 </a:solidFill>
                 <a:latin typeface="Cambria" pitchFamily="34" charset="0"/>
                 <a:ea typeface="Cambria" pitchFamily="34" charset="-122"/>
@@ -2656,7 +2578,7 @@
             <a:r>
               <a:rPr lang="en-US" sz="1100" dirty="0">
                 <a:solidFill>
-                  <a:srgbClr val="22263A"/>
+                  <a:srgbClr val="333333"/>
                 </a:solidFill>
                 <a:latin typeface="Calibri" pitchFamily="34" charset="0"/>
                 <a:ea typeface="Calibri" pitchFamily="34" charset="-122"/>
@@ -2709,7 +2631,7 @@
             </a:avLst>
           </a:prstGeom>
           <a:solidFill>
-            <a:srgbClr val="1E2761"/>
+            <a:srgbClr val="F3F4F6"/>
           </a:solidFill>
           <a:ln/>
         </p:spPr>
@@ -2729,7 +2651,7 @@
             <a:avLst/>
           </a:prstGeom>
           <a:solidFill>
-            <a:srgbClr val="C9A227"/>
+            <a:srgbClr val="EAEBEF"/>
           </a:solidFill>
           <a:ln/>
         </p:spPr>
@@ -2785,7 +2707,7 @@
             <a:r>
               <a:rPr lang="en-US" sz="1350" b="1" dirty="0">
                 <a:solidFill>
-                  <a:srgbClr val="FFFFFF"/>
+                  <a:srgbClr val="1A1A1A"/>
                 </a:solidFill>
                 <a:latin typeface="Cambria" pitchFamily="34" charset="0"/>
                 <a:ea typeface="Cambria" pitchFamily="34" charset="-122"/>
@@ -2827,7 +2749,7 @@
             <a:r>
               <a:rPr lang="en-US" sz="1100" dirty="0">
                 <a:solidFill>
-                  <a:srgbClr val="CADCFC"/>
+                  <a:srgbClr val="333333"/>
                 </a:solidFill>
                 <a:latin typeface="Calibri" pitchFamily="34" charset="0"/>
                 <a:ea typeface="Calibri" pitchFamily="34" charset="-122"/>
@@ -2892,7 +2814,7 @@
     <p:bg>
       <p:bgPr>
         <a:solidFill>
-          <a:srgbClr val="1E2761"/>
+          <a:srgbClr val="FFFFFF"/>
         </a:solidFill>
       </p:bgPr>
     </p:bg>
@@ -2918,7 +2840,46 @@
         </p:nvSpPr>
         <p:spPr>
           <a:xfrm>
-            <a:off x="822960" y="640080"/>
+            <a:off x="548640" y="320040"/>
+            <a:ext cx="7315200" cy="320040"/>
+          </a:xfrm>
+          <a:prstGeom prst="rect">
+            <a:avLst/>
+          </a:prstGeom>
+          <a:noFill/>
+          <a:ln/>
+        </p:spPr>
+        <p:txBody>
+          <a:bodyPr wrap="square" lIns="0" tIns="0" rIns="0" bIns="0" rtlCol="0" anchor="ctr"/>
+          <a:lstStyle/>
+          <a:p>
+            <a:pPr indent="0" marL="0">
+              <a:buNone/>
+            </a:pPr>
+            <a:r>
+              <a:rPr lang="en-US" sz="1300" b="1" spc="200" kern="0" dirty="0">
+                <a:solidFill>
+                  <a:srgbClr val="6B7280"/>
+                </a:solidFill>
+                <a:latin typeface="Calibri" pitchFamily="34" charset="0"/>
+                <a:ea typeface="Calibri" pitchFamily="34" charset="-122"/>
+                <a:cs typeface="Calibri" pitchFamily="34" charset="-120"/>
+              </a:rPr>
+              <a:t>SUMMARY</a:t>
+            </a:r>
+            <a:endParaRPr lang="en-US" sz="1300" dirty="0"/>
+          </a:p>
+        </p:txBody>
+      </p:sp>
+      <p:sp>
+        <p:nvSpPr>
+          <p:cNvPr id="3" name="Text 1"/>
+          <p:cNvSpPr txBox="1"/>
+          <p:nvPr/>
+        </p:nvSpPr>
+        <p:spPr>
+          <a:xfrm>
+            <a:off x="548640" y="621792"/>
             <a:ext cx="9144000" cy="640080"/>
           </a:xfrm>
           <a:prstGeom prst="rect">
@@ -2937,7 +2898,7 @@
             <a:r>
               <a:rPr lang="en-US" sz="3200" b="1" dirty="0">
                 <a:solidFill>
-                  <a:srgbClr val="FFFFFF"/>
+                  <a:srgbClr val="1A1A1A"/>
                 </a:solidFill>
                 <a:latin typeface="Cambria" pitchFamily="34" charset="0"/>
                 <a:ea typeface="Cambria" pitchFamily="34" charset="-122"/>
@@ -2951,27 +2912,27 @@
       </p:sp>
       <p:sp>
         <p:nvSpPr>
-          <p:cNvPr id="3" name="Shape 1"/>
+          <p:cNvPr id="4" name="Shape 2"/>
           <p:cNvSpPr/>
           <p:nvPr/>
         </p:nvSpPr>
         <p:spPr>
           <a:xfrm>
-            <a:off x="822960" y="1645920"/>
+            <a:off x="548640" y="1691640"/>
             <a:ext cx="548640" cy="548640"/>
           </a:xfrm>
           <a:prstGeom prst="ellipse">
             <a:avLst/>
           </a:prstGeom>
           <a:solidFill>
-            <a:srgbClr val="CADCFC"/>
+            <a:srgbClr val="EAEBEF"/>
           </a:solidFill>
           <a:ln/>
         </p:spPr>
       </p:sp>
       <p:pic>
         <p:nvPicPr>
-          <p:cNvPr id="4" name="Image 0" descr="preencoded.png">    </p:cNvPr>
+          <p:cNvPr id="5" name="Image 0" descr="preencoded.png">    </p:cNvPr>
           <p:cNvPicPr>
             <a:picLocks noChangeAspect="1"/>
           </p:cNvPicPr>
@@ -2985,7 +2946,7 @@
         </p:blipFill>
         <p:spPr>
           <a:xfrm>
-            <a:off x="946404" y="1769364"/>
+            <a:off x="672084" y="1815084"/>
             <a:ext cx="301752" cy="301752"/>
           </a:xfrm>
           <a:prstGeom prst="rect">
@@ -2995,14 +2956,14 @@
       </p:pic>
       <p:sp>
         <p:nvSpPr>
-          <p:cNvPr id="5" name="Text 2"/>
+          <p:cNvPr id="6" name="Text 3"/>
           <p:cNvSpPr txBox="1"/>
           <p:nvPr/>
         </p:nvSpPr>
         <p:spPr>
           <a:xfrm>
-            <a:off x="1600200" y="1600200"/>
-            <a:ext cx="9692640" cy="777240"/>
+            <a:off x="1325880" y="1645920"/>
+            <a:ext cx="9966960" cy="777240"/>
           </a:xfrm>
           <a:prstGeom prst="rect">
             <a:avLst/>
@@ -3023,7 +2984,7 @@
             <a:r>
               <a:rPr lang="en-US" sz="1450" dirty="0">
                 <a:solidFill>
-                  <a:srgbClr val="FFFFFF"/>
+                  <a:srgbClr val="333333"/>
                 </a:solidFill>
                 <a:latin typeface="Calibri" pitchFamily="34" charset="0"/>
                 <a:ea typeface="Calibri" pitchFamily="34" charset="-122"/>
@@ -3037,27 +2998,27 @@
       </p:sp>
       <p:sp>
         <p:nvSpPr>
-          <p:cNvPr id="6" name="Shape 3"/>
+          <p:cNvPr id="7" name="Shape 4"/>
           <p:cNvSpPr/>
           <p:nvPr/>
         </p:nvSpPr>
         <p:spPr>
           <a:xfrm>
-            <a:off x="822960" y="2542032"/>
+            <a:off x="548640" y="2587752"/>
             <a:ext cx="548640" cy="548640"/>
           </a:xfrm>
           <a:prstGeom prst="ellipse">
             <a:avLst/>
           </a:prstGeom>
           <a:solidFill>
-            <a:srgbClr val="CADCFC"/>
+            <a:srgbClr val="EAEBEF"/>
           </a:solidFill>
           <a:ln/>
         </p:spPr>
       </p:sp>
       <p:pic>
         <p:nvPicPr>
-          <p:cNvPr id="7" name="Image 1" descr="preencoded.png">    </p:cNvPr>
+          <p:cNvPr id="8" name="Image 1" descr="preencoded.png">    </p:cNvPr>
           <p:cNvPicPr>
             <a:picLocks noChangeAspect="1"/>
           </p:cNvPicPr>
@@ -3071,7 +3032,7 @@
         </p:blipFill>
         <p:spPr>
           <a:xfrm>
-            <a:off x="946404" y="2665476"/>
+            <a:off x="672084" y="2711196"/>
             <a:ext cx="301752" cy="301752"/>
           </a:xfrm>
           <a:prstGeom prst="rect">
@@ -3081,14 +3042,14 @@
       </p:pic>
       <p:sp>
         <p:nvSpPr>
-          <p:cNvPr id="8" name="Text 4"/>
+          <p:cNvPr id="9" name="Text 5"/>
           <p:cNvSpPr txBox="1"/>
           <p:nvPr/>
         </p:nvSpPr>
         <p:spPr>
           <a:xfrm>
-            <a:off x="1600200" y="2496312"/>
-            <a:ext cx="9692640" cy="777240"/>
+            <a:off x="1325880" y="2542032"/>
+            <a:ext cx="9966960" cy="777240"/>
           </a:xfrm>
           <a:prstGeom prst="rect">
             <a:avLst/>
@@ -3109,7 +3070,7 @@
             <a:r>
               <a:rPr lang="en-US" sz="1450" dirty="0">
                 <a:solidFill>
-                  <a:srgbClr val="FFFFFF"/>
+                  <a:srgbClr val="333333"/>
                 </a:solidFill>
                 <a:latin typeface="Calibri" pitchFamily="34" charset="0"/>
                 <a:ea typeface="Calibri" pitchFamily="34" charset="-122"/>
@@ -3123,27 +3084,27 @@
       </p:sp>
       <p:sp>
         <p:nvSpPr>
-          <p:cNvPr id="9" name="Shape 5"/>
+          <p:cNvPr id="10" name="Shape 6"/>
           <p:cNvSpPr/>
           <p:nvPr/>
         </p:nvSpPr>
         <p:spPr>
           <a:xfrm>
-            <a:off x="822960" y="3438144"/>
+            <a:off x="548640" y="3483864"/>
             <a:ext cx="548640" cy="548640"/>
           </a:xfrm>
           <a:prstGeom prst="ellipse">
             <a:avLst/>
           </a:prstGeom>
           <a:solidFill>
-            <a:srgbClr val="CADCFC"/>
+            <a:srgbClr val="EAEBEF"/>
           </a:solidFill>
           <a:ln/>
         </p:spPr>
       </p:sp>
       <p:pic>
         <p:nvPicPr>
-          <p:cNvPr id="10" name="Image 2" descr="preencoded.png">    </p:cNvPr>
+          <p:cNvPr id="11" name="Image 2" descr="preencoded.png">    </p:cNvPr>
           <p:cNvPicPr>
             <a:picLocks noChangeAspect="1"/>
           </p:cNvPicPr>
@@ -3157,7 +3118,7 @@
         </p:blipFill>
         <p:spPr>
           <a:xfrm>
-            <a:off x="946404" y="3561588"/>
+            <a:off x="672084" y="3607308"/>
             <a:ext cx="301752" cy="301752"/>
           </a:xfrm>
           <a:prstGeom prst="rect">
@@ -3167,14 +3128,14 @@
       </p:pic>
       <p:sp>
         <p:nvSpPr>
-          <p:cNvPr id="11" name="Text 6"/>
+          <p:cNvPr id="12" name="Text 7"/>
           <p:cNvSpPr txBox="1"/>
           <p:nvPr/>
         </p:nvSpPr>
         <p:spPr>
           <a:xfrm>
-            <a:off x="1600200" y="3392424"/>
-            <a:ext cx="9692640" cy="777240"/>
+            <a:off x="1325880" y="3438144"/>
+            <a:ext cx="9966960" cy="777240"/>
           </a:xfrm>
           <a:prstGeom prst="rect">
             <a:avLst/>
@@ -3195,7 +3156,7 @@
             <a:r>
               <a:rPr lang="en-US" sz="1450" dirty="0">
                 <a:solidFill>
-                  <a:srgbClr val="FFFFFF"/>
+                  <a:srgbClr val="333333"/>
                 </a:solidFill>
                 <a:latin typeface="Calibri" pitchFamily="34" charset="0"/>
                 <a:ea typeface="Calibri" pitchFamily="34" charset="-122"/>
@@ -3209,27 +3170,27 @@
       </p:sp>
       <p:sp>
         <p:nvSpPr>
-          <p:cNvPr id="12" name="Shape 7"/>
+          <p:cNvPr id="13" name="Shape 8"/>
           <p:cNvSpPr/>
           <p:nvPr/>
         </p:nvSpPr>
         <p:spPr>
           <a:xfrm>
-            <a:off x="822960" y="4334256"/>
+            <a:off x="548640" y="4379976"/>
             <a:ext cx="548640" cy="548640"/>
           </a:xfrm>
           <a:prstGeom prst="ellipse">
             <a:avLst/>
           </a:prstGeom>
           <a:solidFill>
-            <a:srgbClr val="CADCFC"/>
+            <a:srgbClr val="EAEBEF"/>
           </a:solidFill>
           <a:ln/>
         </p:spPr>
       </p:sp>
       <p:pic>
         <p:nvPicPr>
-          <p:cNvPr id="13" name="Image 3" descr="preencoded.png">    </p:cNvPr>
+          <p:cNvPr id="14" name="Image 3" descr="preencoded.png">    </p:cNvPr>
           <p:cNvPicPr>
             <a:picLocks noChangeAspect="1"/>
           </p:cNvPicPr>
@@ -3243,7 +3204,7 @@
         </p:blipFill>
         <p:spPr>
           <a:xfrm>
-            <a:off x="946404" y="4457700"/>
+            <a:off x="672084" y="4503420"/>
             <a:ext cx="301752" cy="301752"/>
           </a:xfrm>
           <a:prstGeom prst="rect">
@@ -3253,14 +3214,14 @@
       </p:pic>
       <p:sp>
         <p:nvSpPr>
-          <p:cNvPr id="14" name="Text 8"/>
+          <p:cNvPr id="15" name="Text 9"/>
           <p:cNvSpPr txBox="1"/>
           <p:nvPr/>
         </p:nvSpPr>
         <p:spPr>
           <a:xfrm>
-            <a:off x="1600200" y="4288536"/>
-            <a:ext cx="9692640" cy="777240"/>
+            <a:off x="1325880" y="4334256"/>
+            <a:ext cx="9966960" cy="777240"/>
           </a:xfrm>
           <a:prstGeom prst="rect">
             <a:avLst/>
@@ -3281,7 +3242,7 @@
             <a:r>
               <a:rPr lang="en-US" sz="1450" dirty="0">
                 <a:solidFill>
-                  <a:srgbClr val="FFFFFF"/>
+                  <a:srgbClr val="333333"/>
                 </a:solidFill>
                 <a:latin typeface="Calibri" pitchFamily="34" charset="0"/>
                 <a:ea typeface="Calibri" pitchFamily="34" charset="-122"/>
@@ -3295,27 +3256,27 @@
       </p:sp>
       <p:sp>
         <p:nvSpPr>
-          <p:cNvPr id="15" name="Shape 9"/>
+          <p:cNvPr id="16" name="Shape 10"/>
           <p:cNvSpPr/>
           <p:nvPr/>
         </p:nvSpPr>
         <p:spPr>
           <a:xfrm>
-            <a:off x="822960" y="5230368"/>
+            <a:off x="548640" y="5276088"/>
             <a:ext cx="548640" cy="548640"/>
           </a:xfrm>
           <a:prstGeom prst="ellipse">
             <a:avLst/>
           </a:prstGeom>
           <a:solidFill>
-            <a:srgbClr val="CADCFC"/>
+            <a:srgbClr val="EAEBEF"/>
           </a:solidFill>
           <a:ln/>
         </p:spPr>
       </p:sp>
       <p:pic>
         <p:nvPicPr>
-          <p:cNvPr id="16" name="Image 4" descr="preencoded.png">    </p:cNvPr>
+          <p:cNvPr id="17" name="Image 4" descr="preencoded.png">    </p:cNvPr>
           <p:cNvPicPr>
             <a:picLocks noChangeAspect="1"/>
           </p:cNvPicPr>
@@ -3329,7 +3290,7 @@
         </p:blipFill>
         <p:spPr>
           <a:xfrm>
-            <a:off x="946404" y="5353812"/>
+            <a:off x="672084" y="5399532"/>
             <a:ext cx="301752" cy="301752"/>
           </a:xfrm>
           <a:prstGeom prst="rect">
@@ -3339,14 +3300,14 @@
       </p:pic>
       <p:sp>
         <p:nvSpPr>
-          <p:cNvPr id="17" name="Text 10"/>
+          <p:cNvPr id="18" name="Text 11"/>
           <p:cNvSpPr txBox="1"/>
           <p:nvPr/>
         </p:nvSpPr>
         <p:spPr>
           <a:xfrm>
-            <a:off x="1600200" y="5184648"/>
-            <a:ext cx="9692640" cy="777240"/>
+            <a:off x="1325880" y="5230368"/>
+            <a:ext cx="9966960" cy="777240"/>
           </a:xfrm>
           <a:prstGeom prst="rect">
             <a:avLst/>
@@ -3367,7 +3328,7 @@
             <a:r>
               <a:rPr lang="en-US" sz="1450" dirty="0">
                 <a:solidFill>
-                  <a:srgbClr val="FFFFFF"/>
+                  <a:srgbClr val="333333"/>
                 </a:solidFill>
                 <a:latin typeface="Calibri" pitchFamily="34" charset="0"/>
                 <a:ea typeface="Calibri" pitchFamily="34" charset="-122"/>
@@ -3376,6 +3337,45 @@
               <a:t>議論の全体像（前提・切り口）をチームで最初に揃えられているか</a:t>
             </a:r>
             <a:endParaRPr lang="en-US" sz="1450" dirty="0"/>
+          </a:p>
+        </p:txBody>
+      </p:sp>
+      <p:sp>
+        <p:nvSpPr>
+          <p:cNvPr id="19" name="Text 12"/>
+          <p:cNvSpPr txBox="1"/>
+          <p:nvPr/>
+        </p:nvSpPr>
+        <p:spPr>
+          <a:xfrm>
+            <a:off x="11548872" y="6446520"/>
+            <a:ext cx="457200" cy="274320"/>
+          </a:xfrm>
+          <a:prstGeom prst="rect">
+            <a:avLst/>
+          </a:prstGeom>
+          <a:noFill/>
+          <a:ln/>
+        </p:spPr>
+        <p:txBody>
+          <a:bodyPr wrap="square" lIns="0" tIns="0" rIns="0" bIns="0" rtlCol="0" anchor="ctr"/>
+          <a:lstStyle/>
+          <a:p>
+            <a:pPr algn="r" indent="0" marL="0">
+              <a:buNone/>
+            </a:pPr>
+            <a:r>
+              <a:rPr lang="en-US" sz="1000" dirty="0">
+                <a:solidFill>
+                  <a:srgbClr val="6B7280"/>
+                </a:solidFill>
+                <a:latin typeface="Calibri" pitchFamily="34" charset="0"/>
+                <a:ea typeface="Calibri" pitchFamily="34" charset="-122"/>
+                <a:cs typeface="Calibri" pitchFamily="34" charset="-120"/>
+              </a:rPr>
+              <a:t>11</a:t>
+            </a:r>
+            <a:endParaRPr lang="en-US" sz="1000" dirty="0"/>
           </a:p>
         </p:txBody>
       </p:sp>
@@ -3438,7 +3438,7 @@
             <a:r>
               <a:rPr lang="en-US" sz="1300" b="1" spc="200" kern="0" dirty="0">
                 <a:solidFill>
-                  <a:srgbClr val="C9A227"/>
+                  <a:srgbClr val="6B7280"/>
                 </a:solidFill>
                 <a:latin typeface="Calibri" pitchFamily="34" charset="0"/>
                 <a:ea typeface="Calibri" pitchFamily="34" charset="-122"/>
@@ -3477,7 +3477,7 @@
             <a:r>
               <a:rPr lang="en-US" sz="3000" b="1" dirty="0">
                 <a:solidFill>
-                  <a:srgbClr val="1E2761"/>
+                  <a:srgbClr val="1A1A1A"/>
                 </a:solidFill>
                 <a:latin typeface="Cambria" pitchFamily="34" charset="0"/>
                 <a:ea typeface="Cambria" pitchFamily="34" charset="-122"/>
@@ -3519,7 +3519,7 @@
             <a:r>
               <a:rPr lang="en-US" sz="1500" dirty="0">
                 <a:solidFill>
-                  <a:srgbClr val="22263A"/>
+                  <a:srgbClr val="333333"/>
                 </a:solidFill>
                 <a:latin typeface="Calibri" pitchFamily="34" charset="0"/>
                 <a:ea typeface="Calibri" pitchFamily="34" charset="-122"/>
@@ -3548,7 +3548,7 @@
             </a:avLst>
           </a:prstGeom>
           <a:solidFill>
-            <a:srgbClr val="F4F6FB"/>
+            <a:srgbClr val="F3F4F6"/>
           </a:solidFill>
           <a:ln/>
         </p:spPr>
@@ -3568,7 +3568,7 @@
             <a:avLst/>
           </a:prstGeom>
           <a:solidFill>
-            <a:srgbClr val="CADCFC"/>
+            <a:srgbClr val="EAEBEF"/>
           </a:solidFill>
           <a:ln/>
         </p:spPr>
@@ -3624,7 +3624,7 @@
             <a:r>
               <a:rPr lang="en-US" sz="1700" b="1" dirty="0">
                 <a:solidFill>
-                  <a:srgbClr val="1E2761"/>
+                  <a:srgbClr val="1A1A1A"/>
                 </a:solidFill>
                 <a:latin typeface="Cambria" pitchFamily="34" charset="0"/>
                 <a:ea typeface="Cambria" pitchFamily="34" charset="-122"/>
@@ -3666,7 +3666,7 @@
             <a:r>
               <a:rPr lang="en-US" sz="1300" dirty="0">
                 <a:solidFill>
-                  <a:srgbClr val="22263A"/>
+                  <a:srgbClr val="333333"/>
                 </a:solidFill>
                 <a:latin typeface="Calibri" pitchFamily="34" charset="0"/>
                 <a:ea typeface="Calibri" pitchFamily="34" charset="-122"/>
@@ -3695,7 +3695,7 @@
             </a:avLst>
           </a:prstGeom>
           <a:solidFill>
-            <a:srgbClr val="F4F6FB"/>
+            <a:srgbClr val="F3F4F6"/>
           </a:solidFill>
           <a:ln/>
         </p:spPr>
@@ -3715,7 +3715,7 @@
             <a:avLst/>
           </a:prstGeom>
           <a:solidFill>
-            <a:srgbClr val="CADCFC"/>
+            <a:srgbClr val="EAEBEF"/>
           </a:solidFill>
           <a:ln/>
         </p:spPr>
@@ -3771,7 +3771,7 @@
             <a:r>
               <a:rPr lang="en-US" sz="1700" b="1" dirty="0">
                 <a:solidFill>
-                  <a:srgbClr val="1E2761"/>
+                  <a:srgbClr val="1A1A1A"/>
                 </a:solidFill>
                 <a:latin typeface="Cambria" pitchFamily="34" charset="0"/>
                 <a:ea typeface="Cambria" pitchFamily="34" charset="-122"/>
@@ -3813,7 +3813,7 @@
             <a:r>
               <a:rPr lang="en-US" sz="1300" dirty="0">
                 <a:solidFill>
-                  <a:srgbClr val="22263A"/>
+                  <a:srgbClr val="333333"/>
                 </a:solidFill>
                 <a:latin typeface="Calibri" pitchFamily="34" charset="0"/>
                 <a:ea typeface="Calibri" pitchFamily="34" charset="-122"/>
@@ -3842,7 +3842,7 @@
             </a:avLst>
           </a:prstGeom>
           <a:solidFill>
-            <a:srgbClr val="F4F6FB"/>
+            <a:srgbClr val="F3F4F6"/>
           </a:solidFill>
           <a:ln/>
         </p:spPr>
@@ -3862,7 +3862,7 @@
             <a:avLst/>
           </a:prstGeom>
           <a:solidFill>
-            <a:srgbClr val="CADCFC"/>
+            <a:srgbClr val="EAEBEF"/>
           </a:solidFill>
           <a:ln/>
         </p:spPr>
@@ -3918,7 +3918,7 @@
             <a:r>
               <a:rPr lang="en-US" sz="1700" b="1" dirty="0">
                 <a:solidFill>
-                  <a:srgbClr val="1E2761"/>
+                  <a:srgbClr val="1A1A1A"/>
                 </a:solidFill>
                 <a:latin typeface="Cambria" pitchFamily="34" charset="0"/>
                 <a:ea typeface="Cambria" pitchFamily="34" charset="-122"/>
@@ -3960,7 +3960,7 @@
             <a:r>
               <a:rPr lang="en-US" sz="1300" dirty="0">
                 <a:solidFill>
-                  <a:srgbClr val="22263A"/>
+                  <a:srgbClr val="333333"/>
                 </a:solidFill>
                 <a:latin typeface="Calibri" pitchFamily="34" charset="0"/>
                 <a:ea typeface="Calibri" pitchFamily="34" charset="-122"/>
@@ -4070,7 +4070,7 @@
             <a:r>
               <a:rPr lang="en-US" sz="1300" b="1" spc="200" kern="0" dirty="0">
                 <a:solidFill>
-                  <a:srgbClr val="C9A227"/>
+                  <a:srgbClr val="6B7280"/>
                 </a:solidFill>
                 <a:latin typeface="Calibri" pitchFamily="34" charset="0"/>
                 <a:ea typeface="Calibri" pitchFamily="34" charset="-122"/>
@@ -4109,7 +4109,7 @@
             <a:r>
               <a:rPr lang="en-US" sz="3000" b="1" dirty="0">
                 <a:solidFill>
-                  <a:srgbClr val="1E2761"/>
+                  <a:srgbClr val="1A1A1A"/>
                 </a:solidFill>
                 <a:latin typeface="Cambria" pitchFamily="34" charset="0"/>
                 <a:ea typeface="Cambria" pitchFamily="34" charset="-122"/>
@@ -4136,7 +4136,7 @@
             <a:avLst/>
           </a:prstGeom>
           <a:solidFill>
-            <a:srgbClr val="CADCFC"/>
+            <a:srgbClr val="EAEBEF"/>
           </a:solidFill>
           <a:ln/>
         </p:spPr>
@@ -4192,7 +4192,7 @@
             <a:r>
               <a:rPr lang="en-US" sz="1450" b="1" dirty="0">
                 <a:solidFill>
-                  <a:srgbClr val="1E2761"/>
+                  <a:srgbClr val="1A1A1A"/>
                 </a:solidFill>
                 <a:latin typeface="Cambria" pitchFamily="34" charset="0"/>
                 <a:ea typeface="Cambria" pitchFamily="34" charset="-122"/>
@@ -4234,7 +4234,7 @@
             <a:r>
               <a:rPr lang="en-US" sz="1300" dirty="0">
                 <a:solidFill>
-                  <a:srgbClr val="22263A"/>
+                  <a:srgbClr val="333333"/>
                 </a:solidFill>
                 <a:latin typeface="Calibri" pitchFamily="34" charset="0"/>
                 <a:ea typeface="Calibri" pitchFamily="34" charset="-122"/>
@@ -4263,7 +4263,7 @@
           <a:noFill/>
           <a:ln w="12700">
             <a:solidFill>
-              <a:srgbClr val="E4E7EF"/>
+              <a:srgbClr val="D9DCE3"/>
             </a:solidFill>
             <a:prstDash val="solid"/>
           </a:ln>
@@ -4284,7 +4284,7 @@
             <a:avLst/>
           </a:prstGeom>
           <a:solidFill>
-            <a:srgbClr val="CADCFC"/>
+            <a:srgbClr val="EAEBEF"/>
           </a:solidFill>
           <a:ln/>
         </p:spPr>
@@ -4340,7 +4340,7 @@
             <a:r>
               <a:rPr lang="en-US" sz="1450" b="1" dirty="0">
                 <a:solidFill>
-                  <a:srgbClr val="1E2761"/>
+                  <a:srgbClr val="1A1A1A"/>
                 </a:solidFill>
                 <a:latin typeface="Cambria" pitchFamily="34" charset="0"/>
                 <a:ea typeface="Cambria" pitchFamily="34" charset="-122"/>
@@ -4382,7 +4382,7 @@
             <a:r>
               <a:rPr lang="en-US" sz="1300" dirty="0">
                 <a:solidFill>
-                  <a:srgbClr val="22263A"/>
+                  <a:srgbClr val="333333"/>
                 </a:solidFill>
                 <a:latin typeface="Calibri" pitchFamily="34" charset="0"/>
                 <a:ea typeface="Calibri" pitchFamily="34" charset="-122"/>
@@ -4411,7 +4411,7 @@
           <a:noFill/>
           <a:ln w="12700">
             <a:solidFill>
-              <a:srgbClr val="E4E7EF"/>
+              <a:srgbClr val="D9DCE3"/>
             </a:solidFill>
             <a:prstDash val="solid"/>
           </a:ln>
@@ -4432,7 +4432,7 @@
             <a:avLst/>
           </a:prstGeom>
           <a:solidFill>
-            <a:srgbClr val="CADCFC"/>
+            <a:srgbClr val="EAEBEF"/>
           </a:solidFill>
           <a:ln/>
         </p:spPr>
@@ -4488,7 +4488,7 @@
             <a:r>
               <a:rPr lang="en-US" sz="1450" b="1" dirty="0">
                 <a:solidFill>
-                  <a:srgbClr val="1E2761"/>
+                  <a:srgbClr val="1A1A1A"/>
                 </a:solidFill>
                 <a:latin typeface="Cambria" pitchFamily="34" charset="0"/>
                 <a:ea typeface="Cambria" pitchFamily="34" charset="-122"/>
@@ -4530,7 +4530,7 @@
             <a:r>
               <a:rPr lang="en-US" sz="1300" dirty="0">
                 <a:solidFill>
-                  <a:srgbClr val="22263A"/>
+                  <a:srgbClr val="333333"/>
                 </a:solidFill>
                 <a:latin typeface="Calibri" pitchFamily="34" charset="0"/>
                 <a:ea typeface="Calibri" pitchFamily="34" charset="-122"/>
@@ -4559,7 +4559,7 @@
           <a:noFill/>
           <a:ln w="12700">
             <a:solidFill>
-              <a:srgbClr val="E4E7EF"/>
+              <a:srgbClr val="D9DCE3"/>
             </a:solidFill>
             <a:prstDash val="solid"/>
           </a:ln>
@@ -4580,7 +4580,7 @@
             <a:avLst/>
           </a:prstGeom>
           <a:solidFill>
-            <a:srgbClr val="CADCFC"/>
+            <a:srgbClr val="EAEBEF"/>
           </a:solidFill>
           <a:ln/>
         </p:spPr>
@@ -4636,7 +4636,7 @@
             <a:r>
               <a:rPr lang="en-US" sz="1450" b="1" dirty="0">
                 <a:solidFill>
-                  <a:srgbClr val="1E2761"/>
+                  <a:srgbClr val="1A1A1A"/>
                 </a:solidFill>
                 <a:latin typeface="Cambria" pitchFamily="34" charset="0"/>
                 <a:ea typeface="Cambria" pitchFamily="34" charset="-122"/>
@@ -4678,7 +4678,7 @@
             <a:r>
               <a:rPr lang="en-US" sz="1300" dirty="0">
                 <a:solidFill>
-                  <a:srgbClr val="22263A"/>
+                  <a:srgbClr val="333333"/>
                 </a:solidFill>
                 <a:latin typeface="Calibri" pitchFamily="34" charset="0"/>
                 <a:ea typeface="Calibri" pitchFamily="34" charset="-122"/>
@@ -4707,7 +4707,7 @@
           <a:noFill/>
           <a:ln w="12700">
             <a:solidFill>
-              <a:srgbClr val="E4E7EF"/>
+              <a:srgbClr val="D9DCE3"/>
             </a:solidFill>
             <a:prstDash val="solid"/>
           </a:ln>
@@ -4728,7 +4728,7 @@
             <a:avLst/>
           </a:prstGeom>
           <a:solidFill>
-            <a:srgbClr val="CADCFC"/>
+            <a:srgbClr val="EAEBEF"/>
           </a:solidFill>
           <a:ln/>
         </p:spPr>
@@ -4784,7 +4784,7 @@
             <a:r>
               <a:rPr lang="en-US" sz="1450" b="1" dirty="0">
                 <a:solidFill>
-                  <a:srgbClr val="1E2761"/>
+                  <a:srgbClr val="1A1A1A"/>
                 </a:solidFill>
                 <a:latin typeface="Cambria" pitchFamily="34" charset="0"/>
                 <a:ea typeface="Cambria" pitchFamily="34" charset="-122"/>
@@ -4826,7 +4826,7 @@
             <a:r>
               <a:rPr lang="en-US" sz="1300" dirty="0">
                 <a:solidFill>
-                  <a:srgbClr val="22263A"/>
+                  <a:srgbClr val="333333"/>
                 </a:solidFill>
                 <a:latin typeface="Calibri" pitchFamily="34" charset="0"/>
                 <a:ea typeface="Calibri" pitchFamily="34" charset="-122"/>
@@ -4936,7 +4936,7 @@
             <a:r>
               <a:rPr lang="en-US" sz="1300" b="1" spc="200" kern="0" dirty="0">
                 <a:solidFill>
-                  <a:srgbClr val="C9A227"/>
+                  <a:srgbClr val="6B7280"/>
                 </a:solidFill>
                 <a:latin typeface="Calibri" pitchFamily="34" charset="0"/>
                 <a:ea typeface="Calibri" pitchFamily="34" charset="-122"/>
@@ -4975,7 +4975,7 @@
             <a:r>
               <a:rPr lang="en-US" sz="3000" b="1" dirty="0">
                 <a:solidFill>
-                  <a:srgbClr val="1E2761"/>
+                  <a:srgbClr val="1A1A1A"/>
                 </a:solidFill>
                 <a:latin typeface="Cambria" pitchFamily="34" charset="0"/>
                 <a:ea typeface="Cambria" pitchFamily="34" charset="-122"/>
@@ -5004,7 +5004,7 @@
             </a:avLst>
           </a:prstGeom>
           <a:solidFill>
-            <a:srgbClr val="F4F6FB"/>
+            <a:srgbClr val="F3F4F6"/>
           </a:solidFill>
           <a:ln/>
         </p:spPr>
@@ -5036,7 +5036,7 @@
             <a:r>
               <a:rPr lang="en-US" sz="1500" b="1" dirty="0">
                 <a:solidFill>
-                  <a:srgbClr val="1E2761"/>
+                  <a:srgbClr val="1A1A1A"/>
                 </a:solidFill>
                 <a:latin typeface="Cambria" pitchFamily="34" charset="0"/>
                 <a:ea typeface="Cambria" pitchFamily="34" charset="-122"/>
@@ -5078,7 +5078,7 @@
             <a:r>
               <a:rPr lang="en-US" sz="1150" dirty="0">
                 <a:solidFill>
-                  <a:srgbClr val="22263A"/>
+                  <a:srgbClr val="333333"/>
                 </a:solidFill>
                 <a:latin typeface="Calibri" pitchFamily="34" charset="0"/>
                 <a:ea typeface="Calibri" pitchFamily="34" charset="-122"/>
@@ -5107,9 +5107,14 @@
             </a:avLst>
           </a:prstGeom>
           <a:solidFill>
-            <a:srgbClr val="1E2761"/>
+            <a:srgbClr val="EAEBEF"/>
           </a:solidFill>
-          <a:ln/>
+          <a:ln w="19050">
+            <a:solidFill>
+              <a:srgbClr val="1A1A1A"/>
+            </a:solidFill>
+            <a:prstDash val="solid"/>
+          </a:ln>
         </p:spPr>
       </p:sp>
       <p:sp>
@@ -5139,7 +5144,7 @@
             <a:r>
               <a:rPr lang="en-US" sz="1500" b="1" dirty="0">
                 <a:solidFill>
-                  <a:srgbClr val="FFFFFF"/>
+                  <a:srgbClr val="1A1A1A"/>
                 </a:solidFill>
                 <a:latin typeface="Cambria" pitchFamily="34" charset="0"/>
                 <a:ea typeface="Cambria" pitchFamily="34" charset="-122"/>
@@ -5181,7 +5186,7 @@
             <a:r>
               <a:rPr lang="en-US" sz="1150" dirty="0">
                 <a:solidFill>
-                  <a:srgbClr val="CADCFC"/>
+                  <a:srgbClr val="333333"/>
                 </a:solidFill>
                 <a:latin typeface="Calibri" pitchFamily="34" charset="0"/>
                 <a:ea typeface="Calibri" pitchFamily="34" charset="-122"/>
@@ -5210,7 +5215,7 @@
             </a:avLst>
           </a:prstGeom>
           <a:solidFill>
-            <a:srgbClr val="F4F6FB"/>
+            <a:srgbClr val="F3F4F6"/>
           </a:solidFill>
           <a:ln/>
         </p:spPr>
@@ -5242,7 +5247,7 @@
             <a:r>
               <a:rPr lang="en-US" sz="1500" b="1" dirty="0">
                 <a:solidFill>
-                  <a:srgbClr val="1E2761"/>
+                  <a:srgbClr val="1A1A1A"/>
                 </a:solidFill>
                 <a:latin typeface="Cambria" pitchFamily="34" charset="0"/>
                 <a:ea typeface="Cambria" pitchFamily="34" charset="-122"/>
@@ -5284,7 +5289,7 @@
             <a:r>
               <a:rPr lang="en-US" sz="1150" dirty="0">
                 <a:solidFill>
-                  <a:srgbClr val="22263A"/>
+                  <a:srgbClr val="333333"/>
                 </a:solidFill>
                 <a:latin typeface="Calibri" pitchFamily="34" charset="0"/>
                 <a:ea typeface="Calibri" pitchFamily="34" charset="-122"/>
@@ -5361,7 +5366,7 @@
             </a:avLst>
           </a:prstGeom>
           <a:solidFill>
-            <a:srgbClr val="FDF6E3"/>
+            <a:srgbClr val="F3F4F6"/>
           </a:solidFill>
           <a:ln/>
         </p:spPr>
@@ -5396,7 +5401,7 @@
             <a:r>
               <a:rPr lang="en-US" sz="1300" b="1" dirty="0">
                 <a:solidFill>
-                  <a:srgbClr val="1E2761"/>
+                  <a:srgbClr val="1A1A1A"/>
                 </a:solidFill>
                 <a:latin typeface="Calibri" pitchFamily="34" charset="0"/>
                 <a:ea typeface="Calibri" pitchFamily="34" charset="-122"/>
@@ -5413,7 +5418,7 @@
             <a:r>
               <a:rPr lang="en-US" sz="1300" dirty="0">
                 <a:solidFill>
-                  <a:srgbClr val="22263A"/>
+                  <a:srgbClr val="333333"/>
                 </a:solidFill>
                 <a:latin typeface="Calibri" pitchFamily="34" charset="0"/>
                 <a:ea typeface="Calibri" pitchFamily="34" charset="-122"/>
@@ -5455,7 +5460,7 @@
             <a:r>
               <a:rPr lang="en-US" sz="1300" b="1" dirty="0">
                 <a:solidFill>
-                  <a:srgbClr val="1E2761"/>
+                  <a:srgbClr val="1A1A1A"/>
                 </a:solidFill>
                 <a:latin typeface="Calibri" pitchFamily="34" charset="0"/>
                 <a:ea typeface="Calibri" pitchFamily="34" charset="-122"/>
@@ -5472,7 +5477,7 @@
             <a:r>
               <a:rPr lang="en-US" sz="1300" dirty="0">
                 <a:solidFill>
-                  <a:srgbClr val="22263A"/>
+                  <a:srgbClr val="333333"/>
                 </a:solidFill>
                 <a:latin typeface="Calibri" pitchFamily="34" charset="0"/>
                 <a:ea typeface="Calibri" pitchFamily="34" charset="-122"/>
@@ -5621,7 +5626,7 @@
             <a:r>
               <a:rPr lang="en-US" sz="1300" b="1" spc="200" kern="0" dirty="0">
                 <a:solidFill>
-                  <a:srgbClr val="C9A227"/>
+                  <a:srgbClr val="6B7280"/>
                 </a:solidFill>
                 <a:latin typeface="Calibri" pitchFamily="34" charset="0"/>
                 <a:ea typeface="Calibri" pitchFamily="34" charset="-122"/>
@@ -5660,7 +5665,7 @@
             <a:r>
               <a:rPr lang="en-US" sz="3000" b="1" dirty="0">
                 <a:solidFill>
-                  <a:srgbClr val="1E2761"/>
+                  <a:srgbClr val="1A1A1A"/>
                 </a:solidFill>
                 <a:latin typeface="Cambria" pitchFamily="34" charset="0"/>
                 <a:ea typeface="Cambria" pitchFamily="34" charset="-122"/>
@@ -5689,7 +5694,7 @@
             </a:avLst>
           </a:prstGeom>
           <a:solidFill>
-            <a:srgbClr val="F4F6FB"/>
+            <a:srgbClr val="F3F4F6"/>
           </a:solidFill>
           <a:ln/>
         </p:spPr>
@@ -5709,7 +5714,7 @@
             <a:avLst/>
           </a:prstGeom>
           <a:solidFill>
-            <a:srgbClr val="CADCFC"/>
+            <a:srgbClr val="EAEBEF"/>
           </a:solidFill>
           <a:ln/>
         </p:spPr>
@@ -5765,7 +5770,7 @@
             <a:r>
               <a:rPr lang="en-US" sz="1600" b="1" dirty="0">
                 <a:solidFill>
-                  <a:srgbClr val="1E2761"/>
+                  <a:srgbClr val="1A1A1A"/>
                 </a:solidFill>
                 <a:latin typeface="Cambria" pitchFamily="34" charset="0"/>
                 <a:ea typeface="Cambria" pitchFamily="34" charset="-122"/>
@@ -5807,7 +5812,7 @@
             <a:r>
               <a:rPr lang="en-US" sz="1300" dirty="0">
                 <a:solidFill>
-                  <a:srgbClr val="22263A"/>
+                  <a:srgbClr val="333333"/>
                 </a:solidFill>
                 <a:latin typeface="Calibri" pitchFamily="34" charset="0"/>
                 <a:ea typeface="Calibri" pitchFamily="34" charset="-122"/>
@@ -5824,7 +5829,7 @@
             <a:r>
               <a:rPr lang="en-US" sz="1300" b="1" dirty="0">
                 <a:solidFill>
-                  <a:srgbClr val="1E2761"/>
+                  <a:srgbClr val="1A1A1A"/>
                 </a:solidFill>
                 <a:latin typeface="Calibri" pitchFamily="34" charset="0"/>
                 <a:ea typeface="Calibri" pitchFamily="34" charset="-122"/>
@@ -5841,7 +5846,7 @@
             <a:r>
               <a:rPr lang="en-US" sz="1300" dirty="0">
                 <a:solidFill>
-                  <a:srgbClr val="22263A"/>
+                  <a:srgbClr val="333333"/>
                 </a:solidFill>
                 <a:latin typeface="Calibri" pitchFamily="34" charset="0"/>
                 <a:ea typeface="Calibri" pitchFamily="34" charset="-122"/>
@@ -5870,7 +5875,7 @@
             <a:r>
               <a:rPr lang="en-US" sz="1300" dirty="0">
                 <a:solidFill>
-                  <a:srgbClr val="22263A"/>
+                  <a:srgbClr val="333333"/>
                 </a:solidFill>
                 <a:latin typeface="Calibri" pitchFamily="34" charset="0"/>
                 <a:ea typeface="Calibri" pitchFamily="34" charset="-122"/>
@@ -5899,9 +5904,14 @@
             </a:avLst>
           </a:prstGeom>
           <a:solidFill>
-            <a:srgbClr val="1E2761"/>
+            <a:srgbClr val="FFFFFF"/>
           </a:solidFill>
-          <a:ln/>
+          <a:ln w="19050">
+            <a:solidFill>
+              <a:srgbClr val="1A1A1A"/>
+            </a:solidFill>
+            <a:prstDash val="solid"/>
+          </a:ln>
         </p:spPr>
       </p:sp>
       <p:sp>
@@ -5919,7 +5929,7 @@
             <a:avLst/>
           </a:prstGeom>
           <a:solidFill>
-            <a:srgbClr val="C9A227"/>
+            <a:srgbClr val="EAEBEF"/>
           </a:solidFill>
           <a:ln/>
         </p:spPr>
@@ -5975,7 +5985,7 @@
             <a:r>
               <a:rPr lang="en-US" sz="1600" b="1" dirty="0">
                 <a:solidFill>
-                  <a:srgbClr val="FFFFFF"/>
+                  <a:srgbClr val="1A1A1A"/>
                 </a:solidFill>
                 <a:latin typeface="Cambria" pitchFamily="34" charset="0"/>
                 <a:ea typeface="Cambria" pitchFamily="34" charset="-122"/>
@@ -6017,7 +6027,7 @@
             <a:r>
               <a:rPr lang="en-US" sz="1300" dirty="0">
                 <a:solidFill>
-                  <a:srgbClr val="CADCFC"/>
+                  <a:srgbClr val="333333"/>
                 </a:solidFill>
                 <a:latin typeface="Calibri" pitchFamily="34" charset="0"/>
                 <a:ea typeface="Calibri" pitchFamily="34" charset="-122"/>
@@ -6035,7 +6045,7 @@
             <a:r>
               <a:rPr lang="en-US" sz="1300" dirty="0">
                 <a:solidFill>
-                  <a:srgbClr val="FFFFFF"/>
+                  <a:srgbClr val="333333"/>
                 </a:solidFill>
                 <a:latin typeface="Calibri" pitchFamily="34" charset="0"/>
                 <a:ea typeface="Calibri" pitchFamily="34" charset="-122"/>
@@ -6077,7 +6087,7 @@
             <a:r>
               <a:rPr lang="en-US" sz="950" dirty="0">
                 <a:solidFill>
-                  <a:srgbClr val="CADCFC"/>
+                  <a:srgbClr val="6B7280"/>
                 </a:solidFill>
                 <a:latin typeface="Calibri" pitchFamily="34" charset="0"/>
                 <a:ea typeface="Calibri" pitchFamily="34" charset="-122"/>
@@ -6097,7 +6107,7 @@
             <a:r>
               <a:rPr lang="en-US" sz="950" dirty="0">
                 <a:solidFill>
-                  <a:srgbClr val="CADCFC"/>
+                  <a:srgbClr val="6B7280"/>
                 </a:solidFill>
                 <a:latin typeface="Calibri" pitchFamily="34" charset="0"/>
                 <a:ea typeface="Calibri" pitchFamily="34" charset="-122"/>
@@ -6207,7 +6217,7 @@
             <a:r>
               <a:rPr lang="en-US" sz="1300" b="1" spc="200" kern="0" dirty="0">
                 <a:solidFill>
-                  <a:srgbClr val="C9A227"/>
+                  <a:srgbClr val="6B7280"/>
                 </a:solidFill>
                 <a:latin typeface="Calibri" pitchFamily="34" charset="0"/>
                 <a:ea typeface="Calibri" pitchFamily="34" charset="-122"/>
@@ -6246,7 +6256,7 @@
             <a:r>
               <a:rPr lang="en-US" sz="3000" b="1" dirty="0">
                 <a:solidFill>
-                  <a:srgbClr val="1E2761"/>
+                  <a:srgbClr val="1A1A1A"/>
                 </a:solidFill>
                 <a:latin typeface="Cambria" pitchFamily="34" charset="0"/>
                 <a:ea typeface="Cambria" pitchFamily="34" charset="-122"/>
@@ -6288,7 +6298,7 @@
             <a:r>
               <a:rPr lang="en-US" sz="1400" dirty="0">
                 <a:solidFill>
-                  <a:srgbClr val="22263A"/>
+                  <a:srgbClr val="333333"/>
                 </a:solidFill>
                 <a:latin typeface="Calibri" pitchFamily="34" charset="0"/>
                 <a:ea typeface="Calibri" pitchFamily="34" charset="-122"/>
@@ -6317,7 +6327,7 @@
             </a:avLst>
           </a:prstGeom>
           <a:solidFill>
-            <a:srgbClr val="F4F6FB"/>
+            <a:srgbClr val="F3F4F6"/>
           </a:solidFill>
           <a:ln/>
         </p:spPr>
@@ -6337,7 +6347,7 @@
             <a:avLst/>
           </a:prstGeom>
           <a:solidFill>
-            <a:srgbClr val="CADCFC"/>
+            <a:srgbClr val="EAEBEF"/>
           </a:solidFill>
           <a:ln/>
         </p:spPr>
@@ -6393,7 +6403,7 @@
             <a:r>
               <a:rPr lang="en-US" sz="1400" b="1" dirty="0">
                 <a:solidFill>
-                  <a:srgbClr val="1E2761"/>
+                  <a:srgbClr val="1A1A1A"/>
                 </a:solidFill>
                 <a:latin typeface="Cambria" pitchFamily="34" charset="0"/>
                 <a:ea typeface="Cambria" pitchFamily="34" charset="-122"/>
@@ -6422,7 +6432,7 @@
             </a:avLst>
           </a:prstGeom>
           <a:solidFill>
-            <a:srgbClr val="F4F6FB"/>
+            <a:srgbClr val="F3F4F6"/>
           </a:solidFill>
           <a:ln/>
         </p:spPr>
@@ -6442,7 +6452,7 @@
             <a:avLst/>
           </a:prstGeom>
           <a:solidFill>
-            <a:srgbClr val="CADCFC"/>
+            <a:srgbClr val="EAEBEF"/>
           </a:solidFill>
           <a:ln/>
         </p:spPr>
@@ -6498,7 +6508,7 @@
             <a:r>
               <a:rPr lang="en-US" sz="1400" b="1" dirty="0">
                 <a:solidFill>
-                  <a:srgbClr val="1E2761"/>
+                  <a:srgbClr val="1A1A1A"/>
                 </a:solidFill>
                 <a:latin typeface="Cambria" pitchFamily="34" charset="0"/>
                 <a:ea typeface="Cambria" pitchFamily="34" charset="-122"/>
@@ -6527,7 +6537,7 @@
             </a:avLst>
           </a:prstGeom>
           <a:solidFill>
-            <a:srgbClr val="F4F6FB"/>
+            <a:srgbClr val="F3F4F6"/>
           </a:solidFill>
           <a:ln/>
         </p:spPr>
@@ -6547,7 +6557,7 @@
             <a:avLst/>
           </a:prstGeom>
           <a:solidFill>
-            <a:srgbClr val="CADCFC"/>
+            <a:srgbClr val="EAEBEF"/>
           </a:solidFill>
           <a:ln/>
         </p:spPr>
@@ -6603,7 +6613,7 @@
             <a:r>
               <a:rPr lang="en-US" sz="1400" b="1" dirty="0">
                 <a:solidFill>
-                  <a:srgbClr val="1E2761"/>
+                  <a:srgbClr val="1A1A1A"/>
                 </a:solidFill>
                 <a:latin typeface="Cambria" pitchFamily="34" charset="0"/>
                 <a:ea typeface="Cambria" pitchFamily="34" charset="-122"/>
@@ -6645,7 +6655,7 @@
             <a:r>
               <a:rPr lang="en-US" sz="1150" dirty="0">
                 <a:solidFill>
-                  <a:srgbClr val="22263A"/>
+                  <a:srgbClr val="333333"/>
                 </a:solidFill>
                 <a:latin typeface="Calibri" pitchFamily="34" charset="0"/>
                 <a:ea typeface="Calibri" pitchFamily="34" charset="-122"/>
@@ -6665,7 +6675,7 @@
             <a:r>
               <a:rPr lang="en-US" sz="1150" dirty="0">
                 <a:solidFill>
-                  <a:srgbClr val="22263A"/>
+                  <a:srgbClr val="333333"/>
                 </a:solidFill>
                 <a:latin typeface="Calibri" pitchFamily="34" charset="0"/>
                 <a:ea typeface="Calibri" pitchFamily="34" charset="-122"/>
@@ -6707,7 +6717,7 @@
             <a:r>
               <a:rPr lang="en-US" sz="1150" dirty="0">
                 <a:solidFill>
-                  <a:srgbClr val="22263A"/>
+                  <a:srgbClr val="333333"/>
                 </a:solidFill>
                 <a:latin typeface="Calibri" pitchFamily="34" charset="0"/>
                 <a:ea typeface="Calibri" pitchFamily="34" charset="-122"/>
@@ -6727,7 +6737,7 @@
             <a:r>
               <a:rPr lang="en-US" sz="1150" dirty="0">
                 <a:solidFill>
-                  <a:srgbClr val="22263A"/>
+                  <a:srgbClr val="333333"/>
                 </a:solidFill>
                 <a:latin typeface="Calibri" pitchFamily="34" charset="0"/>
                 <a:ea typeface="Calibri" pitchFamily="34" charset="-122"/>
@@ -6769,7 +6779,7 @@
             <a:r>
               <a:rPr lang="en-US" sz="1150" dirty="0">
                 <a:solidFill>
-                  <a:srgbClr val="22263A"/>
+                  <a:srgbClr val="333333"/>
                 </a:solidFill>
                 <a:latin typeface="Calibri" pitchFamily="34" charset="0"/>
                 <a:ea typeface="Calibri" pitchFamily="34" charset="-122"/>
@@ -6789,7 +6799,7 @@
             <a:r>
               <a:rPr lang="en-US" sz="1150" dirty="0">
                 <a:solidFill>
-                  <a:srgbClr val="22263A"/>
+                  <a:srgbClr val="333333"/>
                 </a:solidFill>
                 <a:latin typeface="Calibri" pitchFamily="34" charset="0"/>
                 <a:ea typeface="Calibri" pitchFamily="34" charset="-122"/>
@@ -6866,7 +6876,7 @@
             </a:avLst>
           </a:prstGeom>
           <a:solidFill>
-            <a:srgbClr val="FDF6E3"/>
+            <a:srgbClr val="F3F4F6"/>
           </a:solidFill>
           <a:ln/>
         </p:spPr>
@@ -6901,7 +6911,7 @@
             <a:r>
               <a:rPr lang="en-US" sz="1300" b="1" dirty="0">
                 <a:solidFill>
-                  <a:srgbClr val="1E2761"/>
+                  <a:srgbClr val="1A1A1A"/>
                 </a:solidFill>
                 <a:latin typeface="Calibri" pitchFamily="34" charset="0"/>
                 <a:ea typeface="Calibri" pitchFamily="34" charset="-122"/>
@@ -6918,7 +6928,7 @@
             <a:r>
               <a:rPr lang="en-US" sz="1300" dirty="0">
                 <a:solidFill>
-                  <a:srgbClr val="22263A"/>
+                  <a:srgbClr val="333333"/>
                 </a:solidFill>
                 <a:latin typeface="Calibri" pitchFamily="34" charset="0"/>
                 <a:ea typeface="Calibri" pitchFamily="34" charset="-122"/>
@@ -7028,7 +7038,7 @@
             <a:r>
               <a:rPr lang="en-US" sz="1300" b="1" spc="200" kern="0" dirty="0">
                 <a:solidFill>
-                  <a:srgbClr val="C9A227"/>
+                  <a:srgbClr val="6B7280"/>
                 </a:solidFill>
                 <a:latin typeface="Calibri" pitchFamily="34" charset="0"/>
                 <a:ea typeface="Calibri" pitchFamily="34" charset="-122"/>
@@ -7067,7 +7077,7 @@
             <a:r>
               <a:rPr lang="en-US" sz="3000" b="1" dirty="0">
                 <a:solidFill>
-                  <a:srgbClr val="1E2761"/>
+                  <a:srgbClr val="1A1A1A"/>
                 </a:solidFill>
                 <a:latin typeface="Cambria" pitchFamily="34" charset="0"/>
                 <a:ea typeface="Cambria" pitchFamily="34" charset="-122"/>
@@ -7109,7 +7119,7 @@
             <a:r>
               <a:rPr lang="en-US" sz="1400" dirty="0">
                 <a:solidFill>
-                  <a:srgbClr val="22263A"/>
+                  <a:srgbClr val="333333"/>
                 </a:solidFill>
                 <a:latin typeface="Calibri" pitchFamily="34" charset="0"/>
                 <a:ea typeface="Calibri" pitchFamily="34" charset="-122"/>
@@ -7138,7 +7148,7 @@
             </a:avLst>
           </a:prstGeom>
           <a:solidFill>
-            <a:srgbClr val="F4F6FB"/>
+            <a:srgbClr val="F3F4F6"/>
           </a:solidFill>
           <a:ln/>
         </p:spPr>
@@ -7158,7 +7168,7 @@
             <a:avLst/>
           </a:prstGeom>
           <a:solidFill>
-            <a:srgbClr val="CADCFC"/>
+            <a:srgbClr val="EAEBEF"/>
           </a:solidFill>
           <a:ln/>
         </p:spPr>
@@ -7214,7 +7224,7 @@
             <a:r>
               <a:rPr lang="en-US" sz="1450" b="1" dirty="0">
                 <a:solidFill>
-                  <a:srgbClr val="1E2761"/>
+                  <a:srgbClr val="1A1A1A"/>
                 </a:solidFill>
                 <a:latin typeface="Cambria" pitchFamily="34" charset="0"/>
                 <a:ea typeface="Cambria" pitchFamily="34" charset="-122"/>
@@ -7256,7 +7266,7 @@
             <a:r>
               <a:rPr lang="en-US" sz="1200" dirty="0">
                 <a:solidFill>
-                  <a:srgbClr val="22263A"/>
+                  <a:srgbClr val="333333"/>
                 </a:solidFill>
                 <a:latin typeface="Calibri" pitchFamily="34" charset="0"/>
                 <a:ea typeface="Calibri" pitchFamily="34" charset="-122"/>
@@ -7285,7 +7295,7 @@
             </a:avLst>
           </a:prstGeom>
           <a:solidFill>
-            <a:srgbClr val="F4F6FB"/>
+            <a:srgbClr val="F3F4F6"/>
           </a:solidFill>
           <a:ln/>
         </p:spPr>
@@ -7305,7 +7315,7 @@
             <a:avLst/>
           </a:prstGeom>
           <a:solidFill>
-            <a:srgbClr val="CADCFC"/>
+            <a:srgbClr val="EAEBEF"/>
           </a:solidFill>
           <a:ln/>
         </p:spPr>
@@ -7361,7 +7371,7 @@
             <a:r>
               <a:rPr lang="en-US" sz="1450" b="1" dirty="0">
                 <a:solidFill>
-                  <a:srgbClr val="1E2761"/>
+                  <a:srgbClr val="1A1A1A"/>
                 </a:solidFill>
                 <a:latin typeface="Cambria" pitchFamily="34" charset="0"/>
                 <a:ea typeface="Cambria" pitchFamily="34" charset="-122"/>
@@ -7403,7 +7413,7 @@
             <a:r>
               <a:rPr lang="en-US" sz="1200" dirty="0">
                 <a:solidFill>
-                  <a:srgbClr val="22263A"/>
+                  <a:srgbClr val="333333"/>
                 </a:solidFill>
                 <a:latin typeface="Calibri" pitchFamily="34" charset="0"/>
                 <a:ea typeface="Calibri" pitchFamily="34" charset="-122"/>
@@ -7432,7 +7442,7 @@
             </a:avLst>
           </a:prstGeom>
           <a:solidFill>
-            <a:srgbClr val="F4F6FB"/>
+            <a:srgbClr val="F3F4F6"/>
           </a:solidFill>
           <a:ln/>
         </p:spPr>
@@ -7452,7 +7462,7 @@
             <a:avLst/>
           </a:prstGeom>
           <a:solidFill>
-            <a:srgbClr val="CADCFC"/>
+            <a:srgbClr val="EAEBEF"/>
           </a:solidFill>
           <a:ln/>
         </p:spPr>
@@ -7508,7 +7518,7 @@
             <a:r>
               <a:rPr lang="en-US" sz="1450" b="1" dirty="0">
                 <a:solidFill>
-                  <a:srgbClr val="1E2761"/>
+                  <a:srgbClr val="1A1A1A"/>
                 </a:solidFill>
                 <a:latin typeface="Cambria" pitchFamily="34" charset="0"/>
                 <a:ea typeface="Cambria" pitchFamily="34" charset="-122"/>
@@ -7550,7 +7560,7 @@
             <a:r>
               <a:rPr lang="en-US" sz="1200" dirty="0">
                 <a:solidFill>
-                  <a:srgbClr val="22263A"/>
+                  <a:srgbClr val="333333"/>
                 </a:solidFill>
                 <a:latin typeface="Calibri" pitchFamily="34" charset="0"/>
                 <a:ea typeface="Calibri" pitchFamily="34" charset="-122"/>
@@ -7660,7 +7670,7 @@
             <a:r>
               <a:rPr lang="en-US" sz="1300" b="1" spc="200" kern="0" dirty="0">
                 <a:solidFill>
-                  <a:srgbClr val="C9A227"/>
+                  <a:srgbClr val="6B7280"/>
                 </a:solidFill>
                 <a:latin typeface="Calibri" pitchFamily="34" charset="0"/>
                 <a:ea typeface="Calibri" pitchFamily="34" charset="-122"/>
@@ -7699,7 +7709,7 @@
             <a:r>
               <a:rPr lang="en-US" sz="3000" b="1" dirty="0">
                 <a:solidFill>
-                  <a:srgbClr val="1E2761"/>
+                  <a:srgbClr val="1A1A1A"/>
                 </a:solidFill>
                 <a:latin typeface="Cambria" pitchFamily="34" charset="0"/>
                 <a:ea typeface="Cambria" pitchFamily="34" charset="-122"/>
@@ -7751,7 +7761,7 @@
                       <a:r>
                         <a:rPr lang="en-US" sz="1300" b="1" dirty="0">
                           <a:solidFill>
-                            <a:srgbClr val="FFFFFF"/>
+                            <a:srgbClr val="1A1A1A"/>
                           </a:solidFill>
                           <a:latin typeface="Calibri" pitchFamily="34" charset="0"/>
                           <a:ea typeface="Calibri" pitchFamily="34" charset="-122"/>
@@ -7769,7 +7779,7 @@
                   <a:tcPr marL="91440" marR="91440" marT="45720" marB="45720" anchor="ctr">
                     <a:lnL w="12700" cap="flat" cmpd="sng" algn="ctr">
                       <a:solidFill>
-                        <a:srgbClr val="E4E7EF"/>
+                        <a:srgbClr val="D9DCE3"/>
                       </a:solidFill>
                       <a:prstDash val="solid"/>
                       <a:round/>
@@ -7778,7 +7788,7 @@
                     </a:lnL>
                     <a:lnR w="12700" cap="flat" cmpd="sng" algn="ctr">
                       <a:solidFill>
-                        <a:srgbClr val="E4E7EF"/>
+                        <a:srgbClr val="D9DCE3"/>
                       </a:solidFill>
                       <a:prstDash val="solid"/>
                       <a:round/>
@@ -7787,7 +7797,7 @@
                     </a:lnR>
                     <a:lnT w="12700" cap="flat" cmpd="sng" algn="ctr">
                       <a:solidFill>
-                        <a:srgbClr val="E4E7EF"/>
+                        <a:srgbClr val="D9DCE3"/>
                       </a:solidFill>
                       <a:prstDash val="solid"/>
                       <a:round/>
@@ -7796,7 +7806,7 @@
                     </a:lnT>
                     <a:lnB w="12700" cap="flat" cmpd="sng" algn="ctr">
                       <a:solidFill>
-                        <a:srgbClr val="E4E7EF"/>
+                        <a:srgbClr val="D9DCE3"/>
                       </a:solidFill>
                       <a:prstDash val="solid"/>
                       <a:round/>
@@ -7804,7 +7814,7 @@
                       <a:tailEnd type="none" w="med" len="med"/>
                     </a:lnB>
                     <a:solidFill>
-                      <a:srgbClr val="1E2761"/>
+                      <a:srgbClr val="EAEBEF"/>
                     </a:solidFill>
                   </a:tcPr>
                 </a:tc>
@@ -7819,7 +7829,7 @@
                       <a:r>
                         <a:rPr lang="en-US" sz="1300" b="1" dirty="0">
                           <a:solidFill>
-                            <a:srgbClr val="FFFFFF"/>
+                            <a:srgbClr val="1A1A1A"/>
                           </a:solidFill>
                           <a:latin typeface="Calibri" pitchFamily="34" charset="0"/>
                           <a:ea typeface="Calibri" pitchFamily="34" charset="-122"/>
@@ -7837,7 +7847,7 @@
                   <a:tcPr marL="91440" marR="91440" marT="45720" marB="45720" anchor="ctr">
                     <a:lnL w="12700" cap="flat" cmpd="sng" algn="ctr">
                       <a:solidFill>
-                        <a:srgbClr val="E4E7EF"/>
+                        <a:srgbClr val="D9DCE3"/>
                       </a:solidFill>
                       <a:prstDash val="solid"/>
                       <a:round/>
@@ -7846,7 +7856,7 @@
                     </a:lnL>
                     <a:lnR w="12700" cap="flat" cmpd="sng" algn="ctr">
                       <a:solidFill>
-                        <a:srgbClr val="E4E7EF"/>
+                        <a:srgbClr val="D9DCE3"/>
                       </a:solidFill>
                       <a:prstDash val="solid"/>
                       <a:round/>
@@ -7855,7 +7865,7 @@
                     </a:lnR>
                     <a:lnT w="12700" cap="flat" cmpd="sng" algn="ctr">
                       <a:solidFill>
-                        <a:srgbClr val="E4E7EF"/>
+                        <a:srgbClr val="D9DCE3"/>
                       </a:solidFill>
                       <a:prstDash val="solid"/>
                       <a:round/>
@@ -7864,7 +7874,7 @@
                     </a:lnT>
                     <a:lnB w="12700" cap="flat" cmpd="sng" algn="ctr">
                       <a:solidFill>
-                        <a:srgbClr val="E4E7EF"/>
+                        <a:srgbClr val="D9DCE3"/>
                       </a:solidFill>
                       <a:prstDash val="solid"/>
                       <a:round/>
@@ -7872,7 +7882,7 @@
                       <a:tailEnd type="none" w="med" len="med"/>
                     </a:lnB>
                     <a:solidFill>
-                      <a:srgbClr val="1E2761"/>
+                      <a:srgbClr val="EAEBEF"/>
                     </a:solidFill>
                   </a:tcPr>
                 </a:tc>
@@ -7887,7 +7897,7 @@
                       <a:r>
                         <a:rPr lang="en-US" sz="1300" b="1" dirty="0">
                           <a:solidFill>
-                            <a:srgbClr val="FFFFFF"/>
+                            <a:srgbClr val="1A1A1A"/>
                           </a:solidFill>
                           <a:latin typeface="Calibri" pitchFamily="34" charset="0"/>
                           <a:ea typeface="Calibri" pitchFamily="34" charset="-122"/>
@@ -7905,7 +7915,7 @@
                   <a:tcPr marL="91440" marR="91440" marT="45720" marB="45720" anchor="ctr">
                     <a:lnL w="12700" cap="flat" cmpd="sng" algn="ctr">
                       <a:solidFill>
-                        <a:srgbClr val="E4E7EF"/>
+                        <a:srgbClr val="D9DCE3"/>
                       </a:solidFill>
                       <a:prstDash val="solid"/>
                       <a:round/>
@@ -7914,7 +7924,7 @@
                     </a:lnL>
                     <a:lnR w="12700" cap="flat" cmpd="sng" algn="ctr">
                       <a:solidFill>
-                        <a:srgbClr val="E4E7EF"/>
+                        <a:srgbClr val="D9DCE3"/>
                       </a:solidFill>
                       <a:prstDash val="solid"/>
                       <a:round/>
@@ -7923,7 +7933,7 @@
                     </a:lnR>
                     <a:lnT w="12700" cap="flat" cmpd="sng" algn="ctr">
                       <a:solidFill>
-                        <a:srgbClr val="E4E7EF"/>
+                        <a:srgbClr val="D9DCE3"/>
                       </a:solidFill>
                       <a:prstDash val="solid"/>
                       <a:round/>
@@ -7932,7 +7942,7 @@
                     </a:lnT>
                     <a:lnB w="12700" cap="flat" cmpd="sng" algn="ctr">
                       <a:solidFill>
-                        <a:srgbClr val="E4E7EF"/>
+                        <a:srgbClr val="D9DCE3"/>
                       </a:solidFill>
                       <a:prstDash val="solid"/>
                       <a:round/>
@@ -7940,7 +7950,7 @@
                       <a:tailEnd type="none" w="med" len="med"/>
                     </a:lnB>
                     <a:solidFill>
-                      <a:srgbClr val="1E2761"/>
+                      <a:srgbClr val="EAEBEF"/>
                     </a:solidFill>
                   </a:tcPr>
                 </a:tc>
@@ -7955,7 +7965,7 @@
                       <a:r>
                         <a:rPr lang="en-US" sz="1300" b="1" dirty="0">
                           <a:solidFill>
-                            <a:srgbClr val="FFFFFF"/>
+                            <a:srgbClr val="1A1A1A"/>
                           </a:solidFill>
                           <a:latin typeface="Calibri" pitchFamily="34" charset="0"/>
                           <a:ea typeface="Calibri" pitchFamily="34" charset="-122"/>
@@ -7973,7 +7983,7 @@
                   <a:tcPr marL="91440" marR="91440" marT="45720" marB="45720" anchor="ctr">
                     <a:lnL w="12700" cap="flat" cmpd="sng" algn="ctr">
                       <a:solidFill>
-                        <a:srgbClr val="E4E7EF"/>
+                        <a:srgbClr val="D9DCE3"/>
                       </a:solidFill>
                       <a:prstDash val="solid"/>
                       <a:round/>
@@ -7982,7 +7992,7 @@
                     </a:lnL>
                     <a:lnR w="12700" cap="flat" cmpd="sng" algn="ctr">
                       <a:solidFill>
-                        <a:srgbClr val="E4E7EF"/>
+                        <a:srgbClr val="D9DCE3"/>
                       </a:solidFill>
                       <a:prstDash val="solid"/>
                       <a:round/>
@@ -7991,7 +8001,7 @@
                     </a:lnR>
                     <a:lnT w="12700" cap="flat" cmpd="sng" algn="ctr">
                       <a:solidFill>
-                        <a:srgbClr val="E4E7EF"/>
+                        <a:srgbClr val="D9DCE3"/>
                       </a:solidFill>
                       <a:prstDash val="solid"/>
                       <a:round/>
@@ -8000,7 +8010,7 @@
                     </a:lnT>
                     <a:lnB w="12700" cap="flat" cmpd="sng" algn="ctr">
                       <a:solidFill>
-                        <a:srgbClr val="E4E7EF"/>
+                        <a:srgbClr val="D9DCE3"/>
                       </a:solidFill>
                       <a:prstDash val="solid"/>
                       <a:round/>
@@ -8008,7 +8018,7 @@
                       <a:tailEnd type="none" w="med" len="med"/>
                     </a:lnB>
                     <a:solidFill>
-                      <a:srgbClr val="1E2761"/>
+                      <a:srgbClr val="EAEBEF"/>
                     </a:solidFill>
                   </a:tcPr>
                 </a:tc>
@@ -8025,7 +8035,7 @@
                       <a:r>
                         <a:rPr lang="en-US" sz="1250" b="1" dirty="0">
                           <a:solidFill>
-                            <a:srgbClr val="1E2761"/>
+                            <a:srgbClr val="1A1A1A"/>
                           </a:solidFill>
                           <a:latin typeface="Calibri" pitchFamily="34" charset="0"/>
                           <a:ea typeface="Calibri" pitchFamily="34" charset="-122"/>
@@ -8043,7 +8053,7 @@
                   <a:tcPr marL="91440" marR="91440" marT="45720" marB="45720" anchor="ctr">
                     <a:lnL w="12700" cap="flat" cmpd="sng" algn="ctr">
                       <a:solidFill>
-                        <a:srgbClr val="E4E7EF"/>
+                        <a:srgbClr val="D9DCE3"/>
                       </a:solidFill>
                       <a:prstDash val="solid"/>
                       <a:round/>
@@ -8052,7 +8062,7 @@
                     </a:lnL>
                     <a:lnR w="12700" cap="flat" cmpd="sng" algn="ctr">
                       <a:solidFill>
-                        <a:srgbClr val="E4E7EF"/>
+                        <a:srgbClr val="D9DCE3"/>
                       </a:solidFill>
                       <a:prstDash val="solid"/>
                       <a:round/>
@@ -8061,7 +8071,7 @@
                     </a:lnR>
                     <a:lnT w="12700" cap="flat" cmpd="sng" algn="ctr">
                       <a:solidFill>
-                        <a:srgbClr val="E4E7EF"/>
+                        <a:srgbClr val="D9DCE3"/>
                       </a:solidFill>
                       <a:prstDash val="solid"/>
                       <a:round/>
@@ -8070,7 +8080,7 @@
                     </a:lnT>
                     <a:lnB w="12700" cap="flat" cmpd="sng" algn="ctr">
                       <a:solidFill>
-                        <a:srgbClr val="E4E7EF"/>
+                        <a:srgbClr val="D9DCE3"/>
                       </a:solidFill>
                       <a:prstDash val="solid"/>
                       <a:round/>
@@ -8090,7 +8100,7 @@
                       <a:r>
                         <a:rPr lang="en-US" sz="1250" dirty="0">
                           <a:solidFill>
-                            <a:srgbClr val="22263A"/>
+                            <a:srgbClr val="333333"/>
                           </a:solidFill>
                           <a:latin typeface="Calibri" pitchFamily="34" charset="0"/>
                           <a:ea typeface="Calibri" pitchFamily="34" charset="-122"/>
@@ -8108,7 +8118,7 @@
                   <a:tcPr marL="91440" marR="91440" marT="45720" marB="45720" anchor="ctr">
                     <a:lnL w="12700" cap="flat" cmpd="sng" algn="ctr">
                       <a:solidFill>
-                        <a:srgbClr val="E4E7EF"/>
+                        <a:srgbClr val="D9DCE3"/>
                       </a:solidFill>
                       <a:prstDash val="solid"/>
                       <a:round/>
@@ -8117,7 +8127,7 @@
                     </a:lnL>
                     <a:lnR w="12700" cap="flat" cmpd="sng" algn="ctr">
                       <a:solidFill>
-                        <a:srgbClr val="E4E7EF"/>
+                        <a:srgbClr val="D9DCE3"/>
                       </a:solidFill>
                       <a:prstDash val="solid"/>
                       <a:round/>
@@ -8126,7 +8136,7 @@
                     </a:lnR>
                     <a:lnT w="12700" cap="flat" cmpd="sng" algn="ctr">
                       <a:solidFill>
-                        <a:srgbClr val="E4E7EF"/>
+                        <a:srgbClr val="D9DCE3"/>
                       </a:solidFill>
                       <a:prstDash val="solid"/>
                       <a:round/>
@@ -8135,7 +8145,7 @@
                     </a:lnT>
                     <a:lnB w="12700" cap="flat" cmpd="sng" algn="ctr">
                       <a:solidFill>
-                        <a:srgbClr val="E4E7EF"/>
+                        <a:srgbClr val="D9DCE3"/>
                       </a:solidFill>
                       <a:prstDash val="solid"/>
                       <a:round/>
@@ -8155,7 +8165,7 @@
                       <a:r>
                         <a:rPr lang="en-US" sz="1250" dirty="0">
                           <a:solidFill>
-                            <a:srgbClr val="22263A"/>
+                            <a:srgbClr val="333333"/>
                           </a:solidFill>
                           <a:latin typeface="Calibri" pitchFamily="34" charset="0"/>
                           <a:ea typeface="Calibri" pitchFamily="34" charset="-122"/>
@@ -8173,7 +8183,7 @@
                   <a:tcPr marL="91440" marR="91440" marT="45720" marB="45720" anchor="ctr">
                     <a:lnL w="12700" cap="flat" cmpd="sng" algn="ctr">
                       <a:solidFill>
-                        <a:srgbClr val="E4E7EF"/>
+                        <a:srgbClr val="D9DCE3"/>
                       </a:solidFill>
                       <a:prstDash val="solid"/>
                       <a:round/>
@@ -8182,7 +8192,7 @@
                     </a:lnL>
                     <a:lnR w="12700" cap="flat" cmpd="sng" algn="ctr">
                       <a:solidFill>
-                        <a:srgbClr val="E4E7EF"/>
+                        <a:srgbClr val="D9DCE3"/>
                       </a:solidFill>
                       <a:prstDash val="solid"/>
                       <a:round/>
@@ -8191,7 +8201,7 @@
                     </a:lnR>
                     <a:lnT w="12700" cap="flat" cmpd="sng" algn="ctr">
                       <a:solidFill>
-                        <a:srgbClr val="E4E7EF"/>
+                        <a:srgbClr val="D9DCE3"/>
                       </a:solidFill>
                       <a:prstDash val="solid"/>
                       <a:round/>
@@ -8200,7 +8210,7 @@
                     </a:lnT>
                     <a:lnB w="12700" cap="flat" cmpd="sng" algn="ctr">
                       <a:solidFill>
-                        <a:srgbClr val="E4E7EF"/>
+                        <a:srgbClr val="D9DCE3"/>
                       </a:solidFill>
                       <a:prstDash val="solid"/>
                       <a:round/>
@@ -8220,7 +8230,7 @@
                       <a:r>
                         <a:rPr lang="en-US" sz="1250" dirty="0">
                           <a:solidFill>
-                            <a:srgbClr val="22263A"/>
+                            <a:srgbClr val="333333"/>
                           </a:solidFill>
                           <a:latin typeface="Calibri" pitchFamily="34" charset="0"/>
                           <a:ea typeface="Calibri" pitchFamily="34" charset="-122"/>
@@ -8238,7 +8248,7 @@
                   <a:tcPr marL="91440" marR="91440" marT="45720" marB="45720" anchor="ctr">
                     <a:lnL w="12700" cap="flat" cmpd="sng" algn="ctr">
                       <a:solidFill>
-                        <a:srgbClr val="E4E7EF"/>
+                        <a:srgbClr val="D9DCE3"/>
                       </a:solidFill>
                       <a:prstDash val="solid"/>
                       <a:round/>
@@ -8247,7 +8257,7 @@
                     </a:lnL>
                     <a:lnR w="12700" cap="flat" cmpd="sng" algn="ctr">
                       <a:solidFill>
-                        <a:srgbClr val="E4E7EF"/>
+                        <a:srgbClr val="D9DCE3"/>
                       </a:solidFill>
                       <a:prstDash val="solid"/>
                       <a:round/>
@@ -8256,7 +8266,7 @@
                     </a:lnR>
                     <a:lnT w="12700" cap="flat" cmpd="sng" algn="ctr">
                       <a:solidFill>
-                        <a:srgbClr val="E4E7EF"/>
+                        <a:srgbClr val="D9DCE3"/>
                       </a:solidFill>
                       <a:prstDash val="solid"/>
                       <a:round/>
@@ -8265,7 +8275,7 @@
                     </a:lnT>
                     <a:lnB w="12700" cap="flat" cmpd="sng" algn="ctr">
                       <a:solidFill>
-                        <a:srgbClr val="E4E7EF"/>
+                        <a:srgbClr val="D9DCE3"/>
                       </a:solidFill>
                       <a:prstDash val="solid"/>
                       <a:round/>
@@ -8287,7 +8297,7 @@
                       <a:r>
                         <a:rPr lang="en-US" sz="1250" b="1" dirty="0">
                           <a:solidFill>
-                            <a:srgbClr val="1E2761"/>
+                            <a:srgbClr val="1A1A1A"/>
                           </a:solidFill>
                           <a:latin typeface="Calibri" pitchFamily="34" charset="0"/>
                           <a:ea typeface="Calibri" pitchFamily="34" charset="-122"/>
@@ -8305,7 +8315,7 @@
                   <a:tcPr marL="91440" marR="91440" marT="45720" marB="45720" anchor="ctr">
                     <a:lnL w="12700" cap="flat" cmpd="sng" algn="ctr">
                       <a:solidFill>
-                        <a:srgbClr val="E4E7EF"/>
+                        <a:srgbClr val="D9DCE3"/>
                       </a:solidFill>
                       <a:prstDash val="solid"/>
                       <a:round/>
@@ -8314,7 +8324,7 @@
                     </a:lnL>
                     <a:lnR w="12700" cap="flat" cmpd="sng" algn="ctr">
                       <a:solidFill>
-                        <a:srgbClr val="E4E7EF"/>
+                        <a:srgbClr val="D9DCE3"/>
                       </a:solidFill>
                       <a:prstDash val="solid"/>
                       <a:round/>
@@ -8323,7 +8333,7 @@
                     </a:lnR>
                     <a:lnT w="12700" cap="flat" cmpd="sng" algn="ctr">
                       <a:solidFill>
-                        <a:srgbClr val="E4E7EF"/>
+                        <a:srgbClr val="D9DCE3"/>
                       </a:solidFill>
                       <a:prstDash val="solid"/>
                       <a:round/>
@@ -8332,7 +8342,7 @@
                     </a:lnT>
                     <a:lnB w="12700" cap="flat" cmpd="sng" algn="ctr">
                       <a:solidFill>
-                        <a:srgbClr val="E4E7EF"/>
+                        <a:srgbClr val="D9DCE3"/>
                       </a:solidFill>
                       <a:prstDash val="solid"/>
                       <a:round/>
@@ -8340,7 +8350,7 @@
                       <a:tailEnd type="none" w="med" len="med"/>
                     </a:lnB>
                     <a:solidFill>
-                      <a:srgbClr val="F4F6FB"/>
+                      <a:srgbClr val="F3F4F6"/>
                     </a:solidFill>
                   </a:tcPr>
                 </a:tc>
@@ -8355,7 +8365,7 @@
                       <a:r>
                         <a:rPr lang="en-US" sz="1250" dirty="0">
                           <a:solidFill>
-                            <a:srgbClr val="22263A"/>
+                            <a:srgbClr val="333333"/>
                           </a:solidFill>
                           <a:latin typeface="Calibri" pitchFamily="34" charset="0"/>
                           <a:ea typeface="Calibri" pitchFamily="34" charset="-122"/>
@@ -8373,7 +8383,7 @@
                   <a:tcPr marL="91440" marR="91440" marT="45720" marB="45720" anchor="ctr">
                     <a:lnL w="12700" cap="flat" cmpd="sng" algn="ctr">
                       <a:solidFill>
-                        <a:srgbClr val="E4E7EF"/>
+                        <a:srgbClr val="D9DCE3"/>
                       </a:solidFill>
                       <a:prstDash val="solid"/>
                       <a:round/>
@@ -8382,7 +8392,7 @@
                     </a:lnL>
                     <a:lnR w="12700" cap="flat" cmpd="sng" algn="ctr">
                       <a:solidFill>
-                        <a:srgbClr val="E4E7EF"/>
+                        <a:srgbClr val="D9DCE3"/>
                       </a:solidFill>
                       <a:prstDash val="solid"/>
                       <a:round/>
@@ -8391,7 +8401,7 @@
                     </a:lnR>
                     <a:lnT w="12700" cap="flat" cmpd="sng" algn="ctr">
                       <a:solidFill>
-                        <a:srgbClr val="E4E7EF"/>
+                        <a:srgbClr val="D9DCE3"/>
                       </a:solidFill>
                       <a:prstDash val="solid"/>
                       <a:round/>
@@ -8400,7 +8410,7 @@
                     </a:lnT>
                     <a:lnB w="12700" cap="flat" cmpd="sng" algn="ctr">
                       <a:solidFill>
-                        <a:srgbClr val="E4E7EF"/>
+                        <a:srgbClr val="D9DCE3"/>
                       </a:solidFill>
                       <a:prstDash val="solid"/>
                       <a:round/>
@@ -8408,7 +8418,7 @@
                       <a:tailEnd type="none" w="med" len="med"/>
                     </a:lnB>
                     <a:solidFill>
-                      <a:srgbClr val="F4F6FB"/>
+                      <a:srgbClr val="F3F4F6"/>
                     </a:solidFill>
                   </a:tcPr>
                 </a:tc>
@@ -8423,7 +8433,7 @@
                       <a:r>
                         <a:rPr lang="en-US" sz="1250" dirty="0">
                           <a:solidFill>
-                            <a:srgbClr val="22263A"/>
+                            <a:srgbClr val="333333"/>
                           </a:solidFill>
                           <a:latin typeface="Calibri" pitchFamily="34" charset="0"/>
                           <a:ea typeface="Calibri" pitchFamily="34" charset="-122"/>
@@ -8441,7 +8451,7 @@
                   <a:tcPr marL="91440" marR="91440" marT="45720" marB="45720" anchor="ctr">
                     <a:lnL w="12700" cap="flat" cmpd="sng" algn="ctr">
                       <a:solidFill>
-                        <a:srgbClr val="E4E7EF"/>
+                        <a:srgbClr val="D9DCE3"/>
                       </a:solidFill>
                       <a:prstDash val="solid"/>
                       <a:round/>
@@ -8450,7 +8460,7 @@
                     </a:lnL>
                     <a:lnR w="12700" cap="flat" cmpd="sng" algn="ctr">
                       <a:solidFill>
-                        <a:srgbClr val="E4E7EF"/>
+                        <a:srgbClr val="D9DCE3"/>
                       </a:solidFill>
                       <a:prstDash val="solid"/>
                       <a:round/>
@@ -8459,7 +8469,7 @@
                     </a:lnR>
                     <a:lnT w="12700" cap="flat" cmpd="sng" algn="ctr">
                       <a:solidFill>
-                        <a:srgbClr val="E4E7EF"/>
+                        <a:srgbClr val="D9DCE3"/>
                       </a:solidFill>
                       <a:prstDash val="solid"/>
                       <a:round/>
@@ -8468,7 +8478,7 @@
                     </a:lnT>
                     <a:lnB w="12700" cap="flat" cmpd="sng" algn="ctr">
                       <a:solidFill>
-                        <a:srgbClr val="E4E7EF"/>
+                        <a:srgbClr val="D9DCE3"/>
                       </a:solidFill>
                       <a:prstDash val="solid"/>
                       <a:round/>
@@ -8476,7 +8486,7 @@
                       <a:tailEnd type="none" w="med" len="med"/>
                     </a:lnB>
                     <a:solidFill>
-                      <a:srgbClr val="F4F6FB"/>
+                      <a:srgbClr val="F3F4F6"/>
                     </a:solidFill>
                   </a:tcPr>
                 </a:tc>
@@ -8491,7 +8501,7 @@
                       <a:r>
                         <a:rPr lang="en-US" sz="1250" dirty="0">
                           <a:solidFill>
-                            <a:srgbClr val="22263A"/>
+                            <a:srgbClr val="333333"/>
                           </a:solidFill>
                           <a:latin typeface="Calibri" pitchFamily="34" charset="0"/>
                           <a:ea typeface="Calibri" pitchFamily="34" charset="-122"/>
@@ -8509,7 +8519,7 @@
                   <a:tcPr marL="91440" marR="91440" marT="45720" marB="45720" anchor="ctr">
                     <a:lnL w="12700" cap="flat" cmpd="sng" algn="ctr">
                       <a:solidFill>
-                        <a:srgbClr val="E4E7EF"/>
+                        <a:srgbClr val="D9DCE3"/>
                       </a:solidFill>
                       <a:prstDash val="solid"/>
                       <a:round/>
@@ -8518,7 +8528,7 @@
                     </a:lnL>
                     <a:lnR w="12700" cap="flat" cmpd="sng" algn="ctr">
                       <a:solidFill>
-                        <a:srgbClr val="E4E7EF"/>
+                        <a:srgbClr val="D9DCE3"/>
                       </a:solidFill>
                       <a:prstDash val="solid"/>
                       <a:round/>
@@ -8527,7 +8537,7 @@
                     </a:lnR>
                     <a:lnT w="12700" cap="flat" cmpd="sng" algn="ctr">
                       <a:solidFill>
-                        <a:srgbClr val="E4E7EF"/>
+                        <a:srgbClr val="D9DCE3"/>
                       </a:solidFill>
                       <a:prstDash val="solid"/>
                       <a:round/>
@@ -8536,7 +8546,7 @@
                     </a:lnT>
                     <a:lnB w="12700" cap="flat" cmpd="sng" algn="ctr">
                       <a:solidFill>
-                        <a:srgbClr val="E4E7EF"/>
+                        <a:srgbClr val="D9DCE3"/>
                       </a:solidFill>
                       <a:prstDash val="solid"/>
                       <a:round/>
@@ -8544,7 +8554,7 @@
                       <a:tailEnd type="none" w="med" len="med"/>
                     </a:lnB>
                     <a:solidFill>
-                      <a:srgbClr val="F4F6FB"/>
+                      <a:srgbClr val="F3F4F6"/>
                     </a:solidFill>
                   </a:tcPr>
                 </a:tc>
@@ -8561,7 +8571,7 @@
                       <a:r>
                         <a:rPr lang="en-US" sz="1250" b="1" dirty="0">
                           <a:solidFill>
-                            <a:srgbClr val="1E2761"/>
+                            <a:srgbClr val="1A1A1A"/>
                           </a:solidFill>
                           <a:latin typeface="Calibri" pitchFamily="34" charset="0"/>
                           <a:ea typeface="Calibri" pitchFamily="34" charset="-122"/>
@@ -8579,7 +8589,7 @@
                   <a:tcPr marL="91440" marR="91440" marT="45720" marB="45720" anchor="ctr">
                     <a:lnL w="12700" cap="flat" cmpd="sng" algn="ctr">
                       <a:solidFill>
-                        <a:srgbClr val="E4E7EF"/>
+                        <a:srgbClr val="D9DCE3"/>
                       </a:solidFill>
                       <a:prstDash val="solid"/>
                       <a:round/>
@@ -8588,7 +8598,7 @@
                     </a:lnL>
                     <a:lnR w="12700" cap="flat" cmpd="sng" algn="ctr">
                       <a:solidFill>
-                        <a:srgbClr val="E4E7EF"/>
+                        <a:srgbClr val="D9DCE3"/>
                       </a:solidFill>
                       <a:prstDash val="solid"/>
                       <a:round/>
@@ -8597,7 +8607,7 @@
                     </a:lnR>
                     <a:lnT w="12700" cap="flat" cmpd="sng" algn="ctr">
                       <a:solidFill>
-                        <a:srgbClr val="E4E7EF"/>
+                        <a:srgbClr val="D9DCE3"/>
                       </a:solidFill>
                       <a:prstDash val="solid"/>
                       <a:round/>
@@ -8606,7 +8616,7 @@
                     </a:lnT>
                     <a:lnB w="12700" cap="flat" cmpd="sng" algn="ctr">
                       <a:solidFill>
-                        <a:srgbClr val="E4E7EF"/>
+                        <a:srgbClr val="D9DCE3"/>
                       </a:solidFill>
                       <a:prstDash val="solid"/>
                       <a:round/>
@@ -8626,7 +8636,7 @@
                       <a:r>
                         <a:rPr lang="en-US" sz="1250" dirty="0">
                           <a:solidFill>
-                            <a:srgbClr val="22263A"/>
+                            <a:srgbClr val="333333"/>
                           </a:solidFill>
                           <a:latin typeface="Calibri" pitchFamily="34" charset="0"/>
                           <a:ea typeface="Calibri" pitchFamily="34" charset="-122"/>
@@ -8644,7 +8654,7 @@
                   <a:tcPr marL="91440" marR="91440" marT="45720" marB="45720" anchor="ctr">
                     <a:lnL w="12700" cap="flat" cmpd="sng" algn="ctr">
                       <a:solidFill>
-                        <a:srgbClr val="E4E7EF"/>
+                        <a:srgbClr val="D9DCE3"/>
                       </a:solidFill>
                       <a:prstDash val="solid"/>
                       <a:round/>
@@ -8653,7 +8663,7 @@
                     </a:lnL>
                     <a:lnR w="12700" cap="flat" cmpd="sng" algn="ctr">
                       <a:solidFill>
-                        <a:srgbClr val="E4E7EF"/>
+                        <a:srgbClr val="D9DCE3"/>
                       </a:solidFill>
                       <a:prstDash val="solid"/>
                       <a:round/>
@@ -8662,7 +8672,7 @@
                     </a:lnR>
                     <a:lnT w="12700" cap="flat" cmpd="sng" algn="ctr">
                       <a:solidFill>
-                        <a:srgbClr val="E4E7EF"/>
+                        <a:srgbClr val="D9DCE3"/>
                       </a:solidFill>
                       <a:prstDash val="solid"/>
                       <a:round/>
@@ -8671,7 +8681,7 @@
                     </a:lnT>
                     <a:lnB w="12700" cap="flat" cmpd="sng" algn="ctr">
                       <a:solidFill>
-                        <a:srgbClr val="E4E7EF"/>
+                        <a:srgbClr val="D9DCE3"/>
                       </a:solidFill>
                       <a:prstDash val="solid"/>
                       <a:round/>
@@ -8691,7 +8701,7 @@
                       <a:r>
                         <a:rPr lang="en-US" sz="1250" dirty="0">
                           <a:solidFill>
-                            <a:srgbClr val="22263A"/>
+                            <a:srgbClr val="333333"/>
                           </a:solidFill>
                           <a:latin typeface="Calibri" pitchFamily="34" charset="0"/>
                           <a:ea typeface="Calibri" pitchFamily="34" charset="-122"/>
@@ -8709,7 +8719,7 @@
                   <a:tcPr marL="91440" marR="91440" marT="45720" marB="45720" anchor="ctr">
                     <a:lnL w="12700" cap="flat" cmpd="sng" algn="ctr">
                       <a:solidFill>
-                        <a:srgbClr val="E4E7EF"/>
+                        <a:srgbClr val="D9DCE3"/>
                       </a:solidFill>
                       <a:prstDash val="solid"/>
                       <a:round/>
@@ -8718,7 +8728,7 @@
                     </a:lnL>
                     <a:lnR w="12700" cap="flat" cmpd="sng" algn="ctr">
                       <a:solidFill>
-                        <a:srgbClr val="E4E7EF"/>
+                        <a:srgbClr val="D9DCE3"/>
                       </a:solidFill>
                       <a:prstDash val="solid"/>
                       <a:round/>
@@ -8727,7 +8737,7 @@
                     </a:lnR>
                     <a:lnT w="12700" cap="flat" cmpd="sng" algn="ctr">
                       <a:solidFill>
-                        <a:srgbClr val="E4E7EF"/>
+                        <a:srgbClr val="D9DCE3"/>
                       </a:solidFill>
                       <a:prstDash val="solid"/>
                       <a:round/>
@@ -8736,7 +8746,7 @@
                     </a:lnT>
                     <a:lnB w="12700" cap="flat" cmpd="sng" algn="ctr">
                       <a:solidFill>
-                        <a:srgbClr val="E4E7EF"/>
+                        <a:srgbClr val="D9DCE3"/>
                       </a:solidFill>
                       <a:prstDash val="solid"/>
                       <a:round/>
@@ -8756,7 +8766,7 @@
                       <a:r>
                         <a:rPr lang="en-US" sz="1250" dirty="0">
                           <a:solidFill>
-                            <a:srgbClr val="22263A"/>
+                            <a:srgbClr val="333333"/>
                           </a:solidFill>
                           <a:latin typeface="Calibri" pitchFamily="34" charset="0"/>
                           <a:ea typeface="Calibri" pitchFamily="34" charset="-122"/>
@@ -8774,7 +8784,7 @@
                   <a:tcPr marL="91440" marR="91440" marT="45720" marB="45720" anchor="ctr">
                     <a:lnL w="12700" cap="flat" cmpd="sng" algn="ctr">
                       <a:solidFill>
-                        <a:srgbClr val="E4E7EF"/>
+                        <a:srgbClr val="D9DCE3"/>
                       </a:solidFill>
                       <a:prstDash val="solid"/>
                       <a:round/>
@@ -8783,7 +8793,7 @@
                     </a:lnL>
                     <a:lnR w="12700" cap="flat" cmpd="sng" algn="ctr">
                       <a:solidFill>
-                        <a:srgbClr val="E4E7EF"/>
+                        <a:srgbClr val="D9DCE3"/>
                       </a:solidFill>
                       <a:prstDash val="solid"/>
                       <a:round/>
@@ -8792,7 +8802,7 @@
                     </a:lnR>
                     <a:lnT w="12700" cap="flat" cmpd="sng" algn="ctr">
                       <a:solidFill>
-                        <a:srgbClr val="E4E7EF"/>
+                        <a:srgbClr val="D9DCE3"/>
                       </a:solidFill>
                       <a:prstDash val="solid"/>
                       <a:round/>
@@ -8801,7 +8811,7 @@
                     </a:lnT>
                     <a:lnB w="12700" cap="flat" cmpd="sng" algn="ctr">
                       <a:solidFill>
-                        <a:srgbClr val="E4E7EF"/>
+                        <a:srgbClr val="D9DCE3"/>
                       </a:solidFill>
                       <a:prstDash val="solid"/>
                       <a:round/>
@@ -8823,7 +8833,7 @@
                       <a:r>
                         <a:rPr lang="en-US" sz="1250" b="1" dirty="0">
                           <a:solidFill>
-                            <a:srgbClr val="1E2761"/>
+                            <a:srgbClr val="1A1A1A"/>
                           </a:solidFill>
                           <a:latin typeface="Calibri" pitchFamily="34" charset="0"/>
                           <a:ea typeface="Calibri" pitchFamily="34" charset="-122"/>
@@ -8841,7 +8851,7 @@
                   <a:tcPr marL="91440" marR="91440" marT="45720" marB="45720" anchor="ctr">
                     <a:lnL w="12700" cap="flat" cmpd="sng" algn="ctr">
                       <a:solidFill>
-                        <a:srgbClr val="E4E7EF"/>
+                        <a:srgbClr val="D9DCE3"/>
                       </a:solidFill>
                       <a:prstDash val="solid"/>
                       <a:round/>
@@ -8850,7 +8860,7 @@
                     </a:lnL>
                     <a:lnR w="12700" cap="flat" cmpd="sng" algn="ctr">
                       <a:solidFill>
-                        <a:srgbClr val="E4E7EF"/>
+                        <a:srgbClr val="D9DCE3"/>
                       </a:solidFill>
                       <a:prstDash val="solid"/>
                       <a:round/>
@@ -8859,7 +8869,7 @@
                     </a:lnR>
                     <a:lnT w="12700" cap="flat" cmpd="sng" algn="ctr">
                       <a:solidFill>
-                        <a:srgbClr val="E4E7EF"/>
+                        <a:srgbClr val="D9DCE3"/>
                       </a:solidFill>
                       <a:prstDash val="solid"/>
                       <a:round/>
@@ -8868,7 +8878,7 @@
                     </a:lnT>
                     <a:lnB w="12700" cap="flat" cmpd="sng" algn="ctr">
                       <a:solidFill>
-                        <a:srgbClr val="E4E7EF"/>
+                        <a:srgbClr val="D9DCE3"/>
                       </a:solidFill>
                       <a:prstDash val="solid"/>
                       <a:round/>
@@ -8876,7 +8886,7 @@
                       <a:tailEnd type="none" w="med" len="med"/>
                     </a:lnB>
                     <a:solidFill>
-                      <a:srgbClr val="F4F6FB"/>
+                      <a:srgbClr val="F3F4F6"/>
                     </a:solidFill>
                   </a:tcPr>
                 </a:tc>
@@ -8891,7 +8901,7 @@
                       <a:r>
                         <a:rPr lang="en-US" sz="1250" dirty="0">
                           <a:solidFill>
-                            <a:srgbClr val="22263A"/>
+                            <a:srgbClr val="333333"/>
                           </a:solidFill>
                           <a:latin typeface="Calibri" pitchFamily="34" charset="0"/>
                           <a:ea typeface="Calibri" pitchFamily="34" charset="-122"/>
@@ -8909,7 +8919,7 @@
                   <a:tcPr marL="91440" marR="91440" marT="45720" marB="45720" anchor="ctr">
                     <a:lnL w="12700" cap="flat" cmpd="sng" algn="ctr">
                       <a:solidFill>
-                        <a:srgbClr val="E4E7EF"/>
+                        <a:srgbClr val="D9DCE3"/>
                       </a:solidFill>
                       <a:prstDash val="solid"/>
                       <a:round/>
@@ -8918,7 +8928,7 @@
                     </a:lnL>
                     <a:lnR w="12700" cap="flat" cmpd="sng" algn="ctr">
                       <a:solidFill>
-                        <a:srgbClr val="E4E7EF"/>
+                        <a:srgbClr val="D9DCE3"/>
                       </a:solidFill>
                       <a:prstDash val="solid"/>
                       <a:round/>
@@ -8927,7 +8937,7 @@
                     </a:lnR>
                     <a:lnT w="12700" cap="flat" cmpd="sng" algn="ctr">
                       <a:solidFill>
-                        <a:srgbClr val="E4E7EF"/>
+                        <a:srgbClr val="D9DCE3"/>
                       </a:solidFill>
                       <a:prstDash val="solid"/>
                       <a:round/>
@@ -8936,7 +8946,7 @@
                     </a:lnT>
                     <a:lnB w="12700" cap="flat" cmpd="sng" algn="ctr">
                       <a:solidFill>
-                        <a:srgbClr val="E4E7EF"/>
+                        <a:srgbClr val="D9DCE3"/>
                       </a:solidFill>
                       <a:prstDash val="solid"/>
                       <a:round/>
@@ -8944,7 +8954,7 @@
                       <a:tailEnd type="none" w="med" len="med"/>
                     </a:lnB>
                     <a:solidFill>
-                      <a:srgbClr val="F4F6FB"/>
+                      <a:srgbClr val="F3F4F6"/>
                     </a:solidFill>
                   </a:tcPr>
                 </a:tc>
@@ -8959,7 +8969,7 @@
                       <a:r>
                         <a:rPr lang="en-US" sz="1250" dirty="0">
                           <a:solidFill>
-                            <a:srgbClr val="22263A"/>
+                            <a:srgbClr val="333333"/>
                           </a:solidFill>
                           <a:latin typeface="Calibri" pitchFamily="34" charset="0"/>
                           <a:ea typeface="Calibri" pitchFamily="34" charset="-122"/>
@@ -8977,7 +8987,7 @@
                   <a:tcPr marL="91440" marR="91440" marT="45720" marB="45720" anchor="ctr">
                     <a:lnL w="12700" cap="flat" cmpd="sng" algn="ctr">
                       <a:solidFill>
-                        <a:srgbClr val="E4E7EF"/>
+                        <a:srgbClr val="D9DCE3"/>
                       </a:solidFill>
                       <a:prstDash val="solid"/>
                       <a:round/>
@@ -8986,7 +8996,7 @@
                     </a:lnL>
                     <a:lnR w="12700" cap="flat" cmpd="sng" algn="ctr">
                       <a:solidFill>
-                        <a:srgbClr val="E4E7EF"/>
+                        <a:srgbClr val="D9DCE3"/>
                       </a:solidFill>
                       <a:prstDash val="solid"/>
                       <a:round/>
@@ -8995,7 +9005,7 @@
                     </a:lnR>
                     <a:lnT w="12700" cap="flat" cmpd="sng" algn="ctr">
                       <a:solidFill>
-                        <a:srgbClr val="E4E7EF"/>
+                        <a:srgbClr val="D9DCE3"/>
                       </a:solidFill>
                       <a:prstDash val="solid"/>
                       <a:round/>
@@ -9004,7 +9014,7 @@
                     </a:lnT>
                     <a:lnB w="12700" cap="flat" cmpd="sng" algn="ctr">
                       <a:solidFill>
-                        <a:srgbClr val="E4E7EF"/>
+                        <a:srgbClr val="D9DCE3"/>
                       </a:solidFill>
                       <a:prstDash val="solid"/>
                       <a:round/>
@@ -9012,7 +9022,7 @@
                       <a:tailEnd type="none" w="med" len="med"/>
                     </a:lnB>
                     <a:solidFill>
-                      <a:srgbClr val="F4F6FB"/>
+                      <a:srgbClr val="F3F4F6"/>
                     </a:solidFill>
                   </a:tcPr>
                 </a:tc>
@@ -9027,7 +9037,7 @@
                       <a:r>
                         <a:rPr lang="en-US" sz="1250" dirty="0">
                           <a:solidFill>
-                            <a:srgbClr val="22263A"/>
+                            <a:srgbClr val="333333"/>
                           </a:solidFill>
                           <a:latin typeface="Calibri" pitchFamily="34" charset="0"/>
                           <a:ea typeface="Calibri" pitchFamily="34" charset="-122"/>
@@ -9045,7 +9055,7 @@
                   <a:tcPr marL="91440" marR="91440" marT="45720" marB="45720" anchor="ctr">
                     <a:lnL w="12700" cap="flat" cmpd="sng" algn="ctr">
                       <a:solidFill>
-                        <a:srgbClr val="E4E7EF"/>
+                        <a:srgbClr val="D9DCE3"/>
                       </a:solidFill>
                       <a:prstDash val="solid"/>
                       <a:round/>
@@ -9054,7 +9064,7 @@
                     </a:lnL>
                     <a:lnR w="12700" cap="flat" cmpd="sng" algn="ctr">
                       <a:solidFill>
-                        <a:srgbClr val="E4E7EF"/>
+                        <a:srgbClr val="D9DCE3"/>
                       </a:solidFill>
                       <a:prstDash val="solid"/>
                       <a:round/>
@@ -9063,7 +9073,7 @@
                     </a:lnR>
                     <a:lnT w="12700" cap="flat" cmpd="sng" algn="ctr">
                       <a:solidFill>
-                        <a:srgbClr val="E4E7EF"/>
+                        <a:srgbClr val="D9DCE3"/>
                       </a:solidFill>
                       <a:prstDash val="solid"/>
                       <a:round/>
@@ -9072,7 +9082,7 @@
                     </a:lnT>
                     <a:lnB w="12700" cap="flat" cmpd="sng" algn="ctr">
                       <a:solidFill>
-                        <a:srgbClr val="E4E7EF"/>
+                        <a:srgbClr val="D9DCE3"/>
                       </a:solidFill>
                       <a:prstDash val="solid"/>
                       <a:round/>
@@ -9080,7 +9090,7 @@
                       <a:tailEnd type="none" w="med" len="med"/>
                     </a:lnB>
                     <a:solidFill>
-                      <a:srgbClr val="F4F6FB"/>
+                      <a:srgbClr val="F3F4F6"/>
                     </a:solidFill>
                   </a:tcPr>
                 </a:tc>
@@ -9187,7 +9197,7 @@
             <a:r>
               <a:rPr lang="en-US" sz="1300" b="1" spc="200" kern="0" dirty="0">
                 <a:solidFill>
-                  <a:srgbClr val="C9A227"/>
+                  <a:srgbClr val="6B7280"/>
                 </a:solidFill>
                 <a:latin typeface="Calibri" pitchFamily="34" charset="0"/>
                 <a:ea typeface="Calibri" pitchFamily="34" charset="-122"/>
@@ -9226,7 +9236,7 @@
             <a:r>
               <a:rPr lang="en-US" sz="3000" b="1" dirty="0">
                 <a:solidFill>
-                  <a:srgbClr val="1E2761"/>
+                  <a:srgbClr val="1A1A1A"/>
                 </a:solidFill>
                 <a:latin typeface="Cambria" pitchFamily="34" charset="0"/>
                 <a:ea typeface="Cambria" pitchFamily="34" charset="-122"/>
@@ -9265,7 +9275,7 @@
             <a:r>
               <a:rPr lang="en-US" sz="1350" dirty="0">
                 <a:solidFill>
-                  <a:srgbClr val="22263A"/>
+                  <a:srgbClr val="333333"/>
                 </a:solidFill>
                 <a:latin typeface="Calibri" pitchFamily="34" charset="0"/>
                 <a:ea typeface="Calibri" pitchFamily="34" charset="-122"/>
@@ -9294,7 +9304,7 @@
             </a:avLst>
           </a:prstGeom>
           <a:solidFill>
-            <a:srgbClr val="F4F6FB"/>
+            <a:srgbClr val="F3F4F6"/>
           </a:solidFill>
           <a:ln/>
         </p:spPr>
@@ -9314,7 +9324,7 @@
             <a:avLst/>
           </a:prstGeom>
           <a:solidFill>
-            <a:srgbClr val="CADCFC"/>
+            <a:srgbClr val="EAEBEF"/>
           </a:solidFill>
           <a:ln/>
         </p:spPr>
@@ -9370,7 +9380,7 @@
             <a:r>
               <a:rPr lang="en-US" sz="1400" b="1" dirty="0">
                 <a:solidFill>
-                  <a:srgbClr val="1E2761"/>
+                  <a:srgbClr val="1A1A1A"/>
                 </a:solidFill>
                 <a:latin typeface="Cambria" pitchFamily="34" charset="0"/>
                 <a:ea typeface="Cambria" pitchFamily="34" charset="-122"/>
@@ -9412,7 +9422,7 @@
             <a:r>
               <a:rPr lang="en-US" sz="1150" dirty="0">
                 <a:solidFill>
-                  <a:srgbClr val="22263A"/>
+                  <a:srgbClr val="333333"/>
                 </a:solidFill>
                 <a:latin typeface="Calibri" pitchFamily="34" charset="0"/>
                 <a:ea typeface="Calibri" pitchFamily="34" charset="-122"/>
@@ -9441,7 +9451,7 @@
             </a:avLst>
           </a:prstGeom>
           <a:solidFill>
-            <a:srgbClr val="F4F6FB"/>
+            <a:srgbClr val="F3F4F6"/>
           </a:solidFill>
           <a:ln/>
         </p:spPr>
@@ -9461,7 +9471,7 @@
             <a:avLst/>
           </a:prstGeom>
           <a:solidFill>
-            <a:srgbClr val="CADCFC"/>
+            <a:srgbClr val="EAEBEF"/>
           </a:solidFill>
           <a:ln/>
         </p:spPr>
@@ -9517,7 +9527,7 @@
             <a:r>
               <a:rPr lang="en-US" sz="1400" b="1" dirty="0">
                 <a:solidFill>
-                  <a:srgbClr val="1E2761"/>
+                  <a:srgbClr val="1A1A1A"/>
                 </a:solidFill>
                 <a:latin typeface="Cambria" pitchFamily="34" charset="0"/>
                 <a:ea typeface="Cambria" pitchFamily="34" charset="-122"/>
@@ -9559,7 +9569,7 @@
             <a:r>
               <a:rPr lang="en-US" sz="1150" dirty="0">
                 <a:solidFill>
-                  <a:srgbClr val="22263A"/>
+                  <a:srgbClr val="333333"/>
                 </a:solidFill>
                 <a:latin typeface="Calibri" pitchFamily="34" charset="0"/>
                 <a:ea typeface="Calibri" pitchFamily="34" charset="-122"/>
@@ -9588,7 +9598,7 @@
             </a:avLst>
           </a:prstGeom>
           <a:solidFill>
-            <a:srgbClr val="F4F6FB"/>
+            <a:srgbClr val="F3F4F6"/>
           </a:solidFill>
           <a:ln/>
         </p:spPr>
@@ -9608,7 +9618,7 @@
             <a:avLst/>
           </a:prstGeom>
           <a:solidFill>
-            <a:srgbClr val="CADCFC"/>
+            <a:srgbClr val="EAEBEF"/>
           </a:solidFill>
           <a:ln/>
         </p:spPr>
@@ -9664,7 +9674,7 @@
             <a:r>
               <a:rPr lang="en-US" sz="1400" b="1" dirty="0">
                 <a:solidFill>
-                  <a:srgbClr val="1E2761"/>
+                  <a:srgbClr val="1A1A1A"/>
                 </a:solidFill>
                 <a:latin typeface="Cambria" pitchFamily="34" charset="0"/>
                 <a:ea typeface="Cambria" pitchFamily="34" charset="-122"/>
@@ -9706,7 +9716,7 @@
             <a:r>
               <a:rPr lang="en-US" sz="1150" dirty="0">
                 <a:solidFill>
-                  <a:srgbClr val="22263A"/>
+                  <a:srgbClr val="333333"/>
                 </a:solidFill>
                 <a:latin typeface="Calibri" pitchFamily="34" charset="0"/>
                 <a:ea typeface="Calibri" pitchFamily="34" charset="-122"/>
@@ -9735,7 +9745,7 @@
             </a:avLst>
           </a:prstGeom>
           <a:solidFill>
-            <a:srgbClr val="F4F6FB"/>
+            <a:srgbClr val="F3F4F6"/>
           </a:solidFill>
           <a:ln/>
         </p:spPr>
@@ -9755,7 +9765,7 @@
             <a:avLst/>
           </a:prstGeom>
           <a:solidFill>
-            <a:srgbClr val="CADCFC"/>
+            <a:srgbClr val="EAEBEF"/>
           </a:solidFill>
           <a:ln/>
         </p:spPr>
@@ -9811,7 +9821,7 @@
             <a:r>
               <a:rPr lang="en-US" sz="1400" b="1" dirty="0">
                 <a:solidFill>
-                  <a:srgbClr val="1E2761"/>
+                  <a:srgbClr val="1A1A1A"/>
                 </a:solidFill>
                 <a:latin typeface="Cambria" pitchFamily="34" charset="0"/>
                 <a:ea typeface="Cambria" pitchFamily="34" charset="-122"/>
@@ -9853,7 +9863,7 @@
             <a:r>
               <a:rPr lang="en-US" sz="1150" dirty="0">
                 <a:solidFill>
-                  <a:srgbClr val="22263A"/>
+                  <a:srgbClr val="333333"/>
                 </a:solidFill>
                 <a:latin typeface="Calibri" pitchFamily="34" charset="0"/>
                 <a:ea typeface="Calibri" pitchFamily="34" charset="-122"/>
@@ -9882,7 +9892,7 @@
             </a:avLst>
           </a:prstGeom>
           <a:solidFill>
-            <a:srgbClr val="F4F6FB"/>
+            <a:srgbClr val="F3F4F6"/>
           </a:solidFill>
           <a:ln/>
         </p:spPr>
@@ -9902,7 +9912,7 @@
             <a:avLst/>
           </a:prstGeom>
           <a:solidFill>
-            <a:srgbClr val="CADCFC"/>
+            <a:srgbClr val="EAEBEF"/>
           </a:solidFill>
           <a:ln/>
         </p:spPr>
@@ -9958,7 +9968,7 @@
             <a:r>
               <a:rPr lang="en-US" sz="1400" b="1" dirty="0">
                 <a:solidFill>
-                  <a:srgbClr val="1E2761"/>
+                  <a:srgbClr val="1A1A1A"/>
                 </a:solidFill>
                 <a:latin typeface="Cambria" pitchFamily="34" charset="0"/>
                 <a:ea typeface="Cambria" pitchFamily="34" charset="-122"/>
@@ -10000,7 +10010,7 @@
             <a:r>
               <a:rPr lang="en-US" sz="1150" dirty="0">
                 <a:solidFill>
-                  <a:srgbClr val="22263A"/>
+                  <a:srgbClr val="333333"/>
                 </a:solidFill>
                 <a:latin typeface="Calibri" pitchFamily="34" charset="0"/>
                 <a:ea typeface="Calibri" pitchFamily="34" charset="-122"/>
@@ -10029,7 +10039,7 @@
             </a:avLst>
           </a:prstGeom>
           <a:solidFill>
-            <a:srgbClr val="F4F6FB"/>
+            <a:srgbClr val="F3F4F6"/>
           </a:solidFill>
           <a:ln/>
         </p:spPr>
@@ -10049,7 +10059,7 @@
             <a:avLst/>
           </a:prstGeom>
           <a:solidFill>
-            <a:srgbClr val="CADCFC"/>
+            <a:srgbClr val="EAEBEF"/>
           </a:solidFill>
           <a:ln/>
         </p:spPr>
@@ -10105,7 +10115,7 @@
             <a:r>
               <a:rPr lang="en-US" sz="1400" b="1" dirty="0">
                 <a:solidFill>
-                  <a:srgbClr val="1E2761"/>
+                  <a:srgbClr val="1A1A1A"/>
                 </a:solidFill>
                 <a:latin typeface="Cambria" pitchFamily="34" charset="0"/>
                 <a:ea typeface="Cambria" pitchFamily="34" charset="-122"/>
@@ -10147,7 +10157,7 @@
             <a:r>
               <a:rPr lang="en-US" sz="1150" dirty="0">
                 <a:solidFill>
-                  <a:srgbClr val="22263A"/>
+                  <a:srgbClr val="333333"/>
                 </a:solidFill>
                 <a:latin typeface="Calibri" pitchFamily="34" charset="0"/>
                 <a:ea typeface="Calibri" pitchFamily="34" charset="-122"/>
